--- a/about/images/equipe-leptonex.pptx
+++ b/about/images/equipe-leptonex.pptx
@@ -4,8 +4,12 @@
   <p:sldMasterIdLst>
     <p:sldMasterId id="2147483648" r:id="rId1"/>
   </p:sldMasterIdLst>
+  <p:notesMasterIdLst>
+    <p:notesMasterId r:id="rId4"/>
+  </p:notesMasterIdLst>
   <p:sldIdLst>
-    <p:sldId id="421" r:id="rId2"/>
+    <p:sldId id="282" r:id="rId2"/>
+    <p:sldId id="421" r:id="rId3"/>
   </p:sldIdLst>
   <p:sldSz cx="12192000" cy="6858000"/>
   <p:notesSz cx="6858000" cy="9144000"/>
@@ -112,6 +116,459 @@
 </p:presentation>
 </file>
 
+<file path=ppt/notesMasters/notesMaster1.xml><?xml version="1.0" encoding="utf-8"?>
+<p:notesMaster xmlns:a="http://schemas.openxmlformats.org/drawingml/2006/main" xmlns:r="http://schemas.openxmlformats.org/officeDocument/2006/relationships" xmlns:p="http://schemas.openxmlformats.org/presentationml/2006/main">
+  <p:cSld>
+    <p:bg>
+      <p:bgRef idx="1001">
+        <a:schemeClr val="bg1"/>
+      </p:bgRef>
+    </p:bg>
+    <p:spTree>
+      <p:nvGrpSpPr>
+        <p:cNvPr id="1" name=""/>
+        <p:cNvGrpSpPr/>
+        <p:nvPr/>
+      </p:nvGrpSpPr>
+      <p:grpSpPr>
+        <a:xfrm>
+          <a:off x="0" y="0"/>
+          <a:ext cx="0" cy="0"/>
+          <a:chOff x="0" y="0"/>
+          <a:chExt cx="0" cy="0"/>
+        </a:xfrm>
+      </p:grpSpPr>
+      <p:sp>
+        <p:nvSpPr>
+          <p:cNvPr id="2" name="Espace réservé de l'en-tête 1"/>
+          <p:cNvSpPr>
+            <a:spLocks noGrp="1"/>
+          </p:cNvSpPr>
+          <p:nvPr>
+            <p:ph type="hdr" sz="quarter"/>
+          </p:nvPr>
+        </p:nvSpPr>
+        <p:spPr>
+          <a:xfrm>
+            <a:off x="0" y="0"/>
+            <a:ext cx="2971800" cy="458788"/>
+          </a:xfrm>
+          <a:prstGeom prst="rect">
+            <a:avLst/>
+          </a:prstGeom>
+        </p:spPr>
+        <p:txBody>
+          <a:bodyPr vert="horz" lIns="91440" tIns="45720" rIns="91440" bIns="45720" rtlCol="0"/>
+          <a:lstStyle>
+            <a:lvl1pPr algn="l">
+              <a:defRPr sz="1200"/>
+            </a:lvl1pPr>
+          </a:lstStyle>
+          <a:p>
+            <a:endParaRPr lang="fr-FR"/>
+          </a:p>
+        </p:txBody>
+      </p:sp>
+      <p:sp>
+        <p:nvSpPr>
+          <p:cNvPr id="3" name="Espace réservé de la date 2"/>
+          <p:cNvSpPr>
+            <a:spLocks noGrp="1"/>
+          </p:cNvSpPr>
+          <p:nvPr>
+            <p:ph type="dt" idx="1"/>
+          </p:nvPr>
+        </p:nvSpPr>
+        <p:spPr>
+          <a:xfrm>
+            <a:off x="3884613" y="0"/>
+            <a:ext cx="2971800" cy="458788"/>
+          </a:xfrm>
+          <a:prstGeom prst="rect">
+            <a:avLst/>
+          </a:prstGeom>
+        </p:spPr>
+        <p:txBody>
+          <a:bodyPr vert="horz" lIns="91440" tIns="45720" rIns="91440" bIns="45720" rtlCol="0"/>
+          <a:lstStyle>
+            <a:lvl1pPr algn="r">
+              <a:defRPr sz="1200"/>
+            </a:lvl1pPr>
+          </a:lstStyle>
+          <a:p>
+            <a:fld id="{3AE3A9DE-E9C9-C149-8489-F7D51112EE34}" type="datetimeFigureOut">
+              <a:rPr lang="fr-FR" smtClean="0"/>
+              <a:t>23/12/2025</a:t>
+            </a:fld>
+            <a:endParaRPr lang="fr-FR"/>
+          </a:p>
+        </p:txBody>
+      </p:sp>
+      <p:sp>
+        <p:nvSpPr>
+          <p:cNvPr id="4" name="Espace réservé de l'image des diapositives 3"/>
+          <p:cNvSpPr>
+            <a:spLocks noGrp="1" noRot="1" noChangeAspect="1"/>
+          </p:cNvSpPr>
+          <p:nvPr>
+            <p:ph type="sldImg" idx="2"/>
+          </p:nvPr>
+        </p:nvSpPr>
+        <p:spPr>
+          <a:xfrm>
+            <a:off x="685800" y="1143000"/>
+            <a:ext cx="5486400" cy="3086100"/>
+          </a:xfrm>
+          <a:prstGeom prst="rect">
+            <a:avLst/>
+          </a:prstGeom>
+          <a:noFill/>
+          <a:ln w="12700">
+            <a:solidFill>
+              <a:prstClr val="black"/>
+            </a:solidFill>
+          </a:ln>
+        </p:spPr>
+        <p:txBody>
+          <a:bodyPr vert="horz" lIns="91440" tIns="45720" rIns="91440" bIns="45720" rtlCol="0" anchor="ctr"/>
+          <a:lstStyle/>
+          <a:p>
+            <a:endParaRPr lang="fr-FR"/>
+          </a:p>
+        </p:txBody>
+      </p:sp>
+      <p:sp>
+        <p:nvSpPr>
+          <p:cNvPr id="5" name="Espace réservé des notes 4"/>
+          <p:cNvSpPr>
+            <a:spLocks noGrp="1"/>
+          </p:cNvSpPr>
+          <p:nvPr>
+            <p:ph type="body" sz="quarter" idx="3"/>
+          </p:nvPr>
+        </p:nvSpPr>
+        <p:spPr>
+          <a:xfrm>
+            <a:off x="685800" y="4400550"/>
+            <a:ext cx="5486400" cy="3600450"/>
+          </a:xfrm>
+          <a:prstGeom prst="rect">
+            <a:avLst/>
+          </a:prstGeom>
+        </p:spPr>
+        <p:txBody>
+          <a:bodyPr vert="horz" lIns="91440" tIns="45720" rIns="91440" bIns="45720" rtlCol="0"/>
+          <a:lstStyle/>
+          <a:p>
+            <a:pPr lvl="0"/>
+            <a:r>
+              <a:rPr lang="fr-FR"/>
+              <a:t>Cliquez pour modifier les styles du texte du masque</a:t>
+            </a:r>
+          </a:p>
+          <a:p>
+            <a:pPr lvl="1"/>
+            <a:r>
+              <a:rPr lang="fr-FR"/>
+              <a:t>Deuxième niveau</a:t>
+            </a:r>
+          </a:p>
+          <a:p>
+            <a:pPr lvl="2"/>
+            <a:r>
+              <a:rPr lang="fr-FR"/>
+              <a:t>Troisième niveau</a:t>
+            </a:r>
+          </a:p>
+          <a:p>
+            <a:pPr lvl="3"/>
+            <a:r>
+              <a:rPr lang="fr-FR"/>
+              <a:t>Quatrième niveau</a:t>
+            </a:r>
+          </a:p>
+          <a:p>
+            <a:pPr lvl="4"/>
+            <a:r>
+              <a:rPr lang="fr-FR"/>
+              <a:t>Cinquième niveau</a:t>
+            </a:r>
+          </a:p>
+        </p:txBody>
+      </p:sp>
+      <p:sp>
+        <p:nvSpPr>
+          <p:cNvPr id="6" name="Espace réservé du pied de page 5"/>
+          <p:cNvSpPr>
+            <a:spLocks noGrp="1"/>
+          </p:cNvSpPr>
+          <p:nvPr>
+            <p:ph type="ftr" sz="quarter" idx="4"/>
+          </p:nvPr>
+        </p:nvSpPr>
+        <p:spPr>
+          <a:xfrm>
+            <a:off x="0" y="8685213"/>
+            <a:ext cx="2971800" cy="458787"/>
+          </a:xfrm>
+          <a:prstGeom prst="rect">
+            <a:avLst/>
+          </a:prstGeom>
+        </p:spPr>
+        <p:txBody>
+          <a:bodyPr vert="horz" lIns="91440" tIns="45720" rIns="91440" bIns="45720" rtlCol="0" anchor="b"/>
+          <a:lstStyle>
+            <a:lvl1pPr algn="l">
+              <a:defRPr sz="1200"/>
+            </a:lvl1pPr>
+          </a:lstStyle>
+          <a:p>
+            <a:endParaRPr lang="fr-FR"/>
+          </a:p>
+        </p:txBody>
+      </p:sp>
+      <p:sp>
+        <p:nvSpPr>
+          <p:cNvPr id="7" name="Espace réservé du numéro de diapositive 6"/>
+          <p:cNvSpPr>
+            <a:spLocks noGrp="1"/>
+          </p:cNvSpPr>
+          <p:nvPr>
+            <p:ph type="sldNum" sz="quarter" idx="5"/>
+          </p:nvPr>
+        </p:nvSpPr>
+        <p:spPr>
+          <a:xfrm>
+            <a:off x="3884613" y="8685213"/>
+            <a:ext cx="2971800" cy="458787"/>
+          </a:xfrm>
+          <a:prstGeom prst="rect">
+            <a:avLst/>
+          </a:prstGeom>
+        </p:spPr>
+        <p:txBody>
+          <a:bodyPr vert="horz" lIns="91440" tIns="45720" rIns="91440" bIns="45720" rtlCol="0" anchor="b"/>
+          <a:lstStyle>
+            <a:lvl1pPr algn="r">
+              <a:defRPr sz="1200"/>
+            </a:lvl1pPr>
+          </a:lstStyle>
+          <a:p>
+            <a:fld id="{4E7F5900-A067-154F-899A-486E722EAD89}" type="slidenum">
+              <a:rPr lang="fr-FR" smtClean="0"/>
+              <a:t>‹N°›</a:t>
+            </a:fld>
+            <a:endParaRPr lang="fr-FR"/>
+          </a:p>
+        </p:txBody>
+      </p:sp>
+    </p:spTree>
+    <p:extLst>
+      <p:ext uri="{BB962C8B-B14F-4D97-AF65-F5344CB8AC3E}">
+        <p14:creationId xmlns:p14="http://schemas.microsoft.com/office/powerpoint/2010/main" val="1584567304"/>
+      </p:ext>
+    </p:extLst>
+  </p:cSld>
+  <p:clrMap bg1="lt1" tx1="dk1" bg2="lt2" tx2="dk2" accent1="accent1" accent2="accent2" accent3="accent3" accent4="accent4" accent5="accent5" accent6="accent6" hlink="hlink" folHlink="folHlink"/>
+  <p:notesStyle>
+    <a:lvl1pPr marL="0" algn="l" defTabSz="914400" rtl="0" eaLnBrk="1" latinLnBrk="0" hangingPunct="1">
+      <a:defRPr sz="1200" kern="1200">
+        <a:solidFill>
+          <a:schemeClr val="tx1"/>
+        </a:solidFill>
+        <a:latin typeface="+mn-lt"/>
+        <a:ea typeface="+mn-ea"/>
+        <a:cs typeface="+mn-cs"/>
+      </a:defRPr>
+    </a:lvl1pPr>
+    <a:lvl2pPr marL="457200" algn="l" defTabSz="914400" rtl="0" eaLnBrk="1" latinLnBrk="0" hangingPunct="1">
+      <a:defRPr sz="1200" kern="1200">
+        <a:solidFill>
+          <a:schemeClr val="tx1"/>
+        </a:solidFill>
+        <a:latin typeface="+mn-lt"/>
+        <a:ea typeface="+mn-ea"/>
+        <a:cs typeface="+mn-cs"/>
+      </a:defRPr>
+    </a:lvl2pPr>
+    <a:lvl3pPr marL="914400" algn="l" defTabSz="914400" rtl="0" eaLnBrk="1" latinLnBrk="0" hangingPunct="1">
+      <a:defRPr sz="1200" kern="1200">
+        <a:solidFill>
+          <a:schemeClr val="tx1"/>
+        </a:solidFill>
+        <a:latin typeface="+mn-lt"/>
+        <a:ea typeface="+mn-ea"/>
+        <a:cs typeface="+mn-cs"/>
+      </a:defRPr>
+    </a:lvl3pPr>
+    <a:lvl4pPr marL="1371600" algn="l" defTabSz="914400" rtl="0" eaLnBrk="1" latinLnBrk="0" hangingPunct="1">
+      <a:defRPr sz="1200" kern="1200">
+        <a:solidFill>
+          <a:schemeClr val="tx1"/>
+        </a:solidFill>
+        <a:latin typeface="+mn-lt"/>
+        <a:ea typeface="+mn-ea"/>
+        <a:cs typeface="+mn-cs"/>
+      </a:defRPr>
+    </a:lvl4pPr>
+    <a:lvl5pPr marL="1828800" algn="l" defTabSz="914400" rtl="0" eaLnBrk="1" latinLnBrk="0" hangingPunct="1">
+      <a:defRPr sz="1200" kern="1200">
+        <a:solidFill>
+          <a:schemeClr val="tx1"/>
+        </a:solidFill>
+        <a:latin typeface="+mn-lt"/>
+        <a:ea typeface="+mn-ea"/>
+        <a:cs typeface="+mn-cs"/>
+      </a:defRPr>
+    </a:lvl5pPr>
+    <a:lvl6pPr marL="2286000" algn="l" defTabSz="914400" rtl="0" eaLnBrk="1" latinLnBrk="0" hangingPunct="1">
+      <a:defRPr sz="1200" kern="1200">
+        <a:solidFill>
+          <a:schemeClr val="tx1"/>
+        </a:solidFill>
+        <a:latin typeface="+mn-lt"/>
+        <a:ea typeface="+mn-ea"/>
+        <a:cs typeface="+mn-cs"/>
+      </a:defRPr>
+    </a:lvl6pPr>
+    <a:lvl7pPr marL="2743200" algn="l" defTabSz="914400" rtl="0" eaLnBrk="1" latinLnBrk="0" hangingPunct="1">
+      <a:defRPr sz="1200" kern="1200">
+        <a:solidFill>
+          <a:schemeClr val="tx1"/>
+        </a:solidFill>
+        <a:latin typeface="+mn-lt"/>
+        <a:ea typeface="+mn-ea"/>
+        <a:cs typeface="+mn-cs"/>
+      </a:defRPr>
+    </a:lvl7pPr>
+    <a:lvl8pPr marL="3200400" algn="l" defTabSz="914400" rtl="0" eaLnBrk="1" latinLnBrk="0" hangingPunct="1">
+      <a:defRPr sz="1200" kern="1200">
+        <a:solidFill>
+          <a:schemeClr val="tx1"/>
+        </a:solidFill>
+        <a:latin typeface="+mn-lt"/>
+        <a:ea typeface="+mn-ea"/>
+        <a:cs typeface="+mn-cs"/>
+      </a:defRPr>
+    </a:lvl8pPr>
+    <a:lvl9pPr marL="3657600" algn="l" defTabSz="914400" rtl="0" eaLnBrk="1" latinLnBrk="0" hangingPunct="1">
+      <a:defRPr sz="1200" kern="1200">
+        <a:solidFill>
+          <a:schemeClr val="tx1"/>
+        </a:solidFill>
+        <a:latin typeface="+mn-lt"/>
+        <a:ea typeface="+mn-ea"/>
+        <a:cs typeface="+mn-cs"/>
+      </a:defRPr>
+    </a:lvl9pPr>
+  </p:notesStyle>
+</p:notesMaster>
+</file>
+
+<file path=ppt/notesSlides/notesSlide1.xml><?xml version="1.0" encoding="utf-8"?>
+<p:notes xmlns:a="http://schemas.openxmlformats.org/drawingml/2006/main" xmlns:r="http://schemas.openxmlformats.org/officeDocument/2006/relationships" xmlns:p="http://schemas.openxmlformats.org/presentationml/2006/main" showMasterSp="0" showMasterPhAnim="0">
+  <p:cSld>
+    <p:spTree>
+      <p:nvGrpSpPr>
+        <p:cNvPr id="1" name="Shape 236"/>
+        <p:cNvGrpSpPr/>
+        <p:nvPr/>
+      </p:nvGrpSpPr>
+      <p:grpSpPr>
+        <a:xfrm>
+          <a:off x="0" y="0"/>
+          <a:ext cx="0" cy="0"/>
+          <a:chOff x="0" y="0"/>
+          <a:chExt cx="0" cy="0"/>
+        </a:xfrm>
+      </p:grpSpPr>
+      <p:sp>
+        <p:nvSpPr>
+          <p:cNvPr id="237" name="Google Shape;237;g387c7329e1e_1_0:notes"/>
+          <p:cNvSpPr txBox="1">
+            <a:spLocks noGrp="1"/>
+          </p:cNvSpPr>
+          <p:nvPr>
+            <p:ph type="body" idx="1"/>
+          </p:nvPr>
+        </p:nvSpPr>
+        <p:spPr>
+          <a:xfrm>
+            <a:off x="685800" y="4400550"/>
+            <a:ext cx="5486400" cy="3600600"/>
+          </a:xfrm>
+          <a:prstGeom prst="rect">
+            <a:avLst/>
+          </a:prstGeom>
+        </p:spPr>
+        <p:txBody>
+          <a:bodyPr spcFirstLastPara="1" wrap="square" lIns="91425" tIns="45700" rIns="91425" bIns="45700" anchor="t" anchorCtr="0">
+            <a:noAutofit/>
+          </a:bodyPr>
+          <a:lstStyle/>
+          <a:p>
+            <a:pPr marL="0" lvl="0" indent="0" algn="l" rtl="0">
+              <a:spcBef>
+                <a:spcPts val="0"/>
+              </a:spcBef>
+              <a:spcAft>
+                <a:spcPts val="0"/>
+              </a:spcAft>
+              <a:buNone/>
+            </a:pPr>
+            <a:endParaRPr/>
+          </a:p>
+        </p:txBody>
+      </p:sp>
+      <p:sp>
+        <p:nvSpPr>
+          <p:cNvPr id="238" name="Google Shape;238;g387c7329e1e_1_0:notes"/>
+          <p:cNvSpPr>
+            <a:spLocks noGrp="1" noRot="1" noChangeAspect="1"/>
+          </p:cNvSpPr>
+          <p:nvPr>
+            <p:ph type="sldImg" idx="2"/>
+          </p:nvPr>
+        </p:nvSpPr>
+        <p:spPr>
+          <a:xfrm>
+            <a:off x="685800" y="1143000"/>
+            <a:ext cx="5486400" cy="3086100"/>
+          </a:xfrm>
+          <a:custGeom>
+            <a:avLst/>
+            <a:gdLst/>
+            <a:ahLst/>
+            <a:cxnLst/>
+            <a:rect l="l" t="t" r="r" b="b"/>
+            <a:pathLst>
+              <a:path w="120000" h="120000" extrusionOk="0">
+                <a:moveTo>
+                  <a:pt x="0" y="0"/>
+                </a:moveTo>
+                <a:lnTo>
+                  <a:pt x="120000" y="0"/>
+                </a:lnTo>
+                <a:lnTo>
+                  <a:pt x="120000" y="120000"/>
+                </a:lnTo>
+                <a:lnTo>
+                  <a:pt x="0" y="120000"/>
+                </a:lnTo>
+                <a:close/>
+              </a:path>
+            </a:pathLst>
+          </a:custGeom>
+        </p:spPr>
+      </p:sp>
+    </p:spTree>
+  </p:cSld>
+  <p:clrMapOvr>
+    <a:masterClrMapping/>
+  </p:clrMapOvr>
+</p:notes>
+</file>
+
 <file path=ppt/slideLayouts/slideLayout1.xml><?xml version="1.0" encoding="utf-8"?>
 <p:sldLayout xmlns:a="http://schemas.openxmlformats.org/drawingml/2006/main" xmlns:r="http://schemas.openxmlformats.org/officeDocument/2006/relationships" xmlns:p="http://schemas.openxmlformats.org/presentationml/2006/main" type="title" preserve="1">
   <p:cSld name="Diapositive de titre">
@@ -259,7 +716,7 @@
           <a:p>
             <a:fld id="{6277BD84-42E0-E148-969D-0479BE8FD03A}" type="datetimeFigureOut">
               <a:rPr lang="fr-FR" smtClean="0"/>
-              <a:t>21/04/2025</a:t>
+              <a:t>23/12/2025</a:t>
             </a:fld>
             <a:endParaRPr lang="fr-FR" dirty="0"/>
           </a:p>
@@ -457,7 +914,7 @@
           <a:p>
             <a:fld id="{6277BD84-42E0-E148-969D-0479BE8FD03A}" type="datetimeFigureOut">
               <a:rPr lang="fr-FR" smtClean="0"/>
-              <a:t>21/04/2025</a:t>
+              <a:t>23/12/2025</a:t>
             </a:fld>
             <a:endParaRPr lang="fr-FR" dirty="0"/>
           </a:p>
@@ -665,7 +1122,7 @@
           <a:p>
             <a:fld id="{6277BD84-42E0-E148-969D-0479BE8FD03A}" type="datetimeFigureOut">
               <a:rPr lang="fr-FR" smtClean="0"/>
-              <a:t>21/04/2025</a:t>
+              <a:t>23/12/2025</a:t>
             </a:fld>
             <a:endParaRPr lang="fr-FR" dirty="0"/>
           </a:p>
@@ -863,7 +1320,7 @@
           <a:p>
             <a:fld id="{6277BD84-42E0-E148-969D-0479BE8FD03A}" type="datetimeFigureOut">
               <a:rPr lang="fr-FR" smtClean="0"/>
-              <a:t>21/04/2025</a:t>
+              <a:t>23/12/2025</a:t>
             </a:fld>
             <a:endParaRPr lang="fr-FR" dirty="0"/>
           </a:p>
@@ -1138,7 +1595,7 @@
           <a:p>
             <a:fld id="{6277BD84-42E0-E148-969D-0479BE8FD03A}" type="datetimeFigureOut">
               <a:rPr lang="fr-FR" smtClean="0"/>
-              <a:t>21/04/2025</a:t>
+              <a:t>23/12/2025</a:t>
             </a:fld>
             <a:endParaRPr lang="fr-FR" dirty="0"/>
           </a:p>
@@ -1403,7 +1860,7 @@
           <a:p>
             <a:fld id="{6277BD84-42E0-E148-969D-0479BE8FD03A}" type="datetimeFigureOut">
               <a:rPr lang="fr-FR" smtClean="0"/>
-              <a:t>21/04/2025</a:t>
+              <a:t>23/12/2025</a:t>
             </a:fld>
             <a:endParaRPr lang="fr-FR" dirty="0"/>
           </a:p>
@@ -1815,7 +2272,7 @@
           <a:p>
             <a:fld id="{6277BD84-42E0-E148-969D-0479BE8FD03A}" type="datetimeFigureOut">
               <a:rPr lang="fr-FR" smtClean="0"/>
-              <a:t>21/04/2025</a:t>
+              <a:t>23/12/2025</a:t>
             </a:fld>
             <a:endParaRPr lang="fr-FR" dirty="0"/>
           </a:p>
@@ -1956,7 +2413,7 @@
           <a:p>
             <a:fld id="{6277BD84-42E0-E148-969D-0479BE8FD03A}" type="datetimeFigureOut">
               <a:rPr lang="fr-FR" smtClean="0"/>
-              <a:t>21/04/2025</a:t>
+              <a:t>23/12/2025</a:t>
             </a:fld>
             <a:endParaRPr lang="fr-FR" dirty="0"/>
           </a:p>
@@ -2069,7 +2526,7 @@
           <a:p>
             <a:fld id="{6277BD84-42E0-E148-969D-0479BE8FD03A}" type="datetimeFigureOut">
               <a:rPr lang="fr-FR" smtClean="0"/>
-              <a:t>21/04/2025</a:t>
+              <a:t>23/12/2025</a:t>
             </a:fld>
             <a:endParaRPr lang="fr-FR" dirty="0"/>
           </a:p>
@@ -2380,7 +2837,7 @@
           <a:p>
             <a:fld id="{6277BD84-42E0-E148-969D-0479BE8FD03A}" type="datetimeFigureOut">
               <a:rPr lang="fr-FR" smtClean="0"/>
-              <a:t>21/04/2025</a:t>
+              <a:t>23/12/2025</a:t>
             </a:fld>
             <a:endParaRPr lang="fr-FR" dirty="0"/>
           </a:p>
@@ -2668,7 +3125,7 @@
           <a:p>
             <a:fld id="{6277BD84-42E0-E148-969D-0479BE8FD03A}" type="datetimeFigureOut">
               <a:rPr lang="fr-FR" smtClean="0"/>
-              <a:t>21/04/2025</a:t>
+              <a:t>23/12/2025</a:t>
             </a:fld>
             <a:endParaRPr lang="fr-FR" dirty="0"/>
           </a:p>
@@ -2909,7 +3366,7 @@
           <a:p>
             <a:fld id="{6277BD84-42E0-E148-969D-0479BE8FD03A}" type="datetimeFigureOut">
               <a:rPr lang="fr-FR" smtClean="0"/>
-              <a:t>21/04/2025</a:t>
+              <a:t>23/12/2025</a:t>
             </a:fld>
             <a:endParaRPr lang="fr-FR" dirty="0"/>
           </a:p>
@@ -3314,6 +3771,2600 @@
   <p:cSld>
     <p:spTree>
       <p:nvGrpSpPr>
+        <p:cNvPr id="1" name="Shape 239"/>
+        <p:cNvGrpSpPr/>
+        <p:nvPr/>
+      </p:nvGrpSpPr>
+      <p:grpSpPr>
+        <a:xfrm>
+          <a:off x="0" y="0"/>
+          <a:ext cx="0" cy="0"/>
+          <a:chOff x="0" y="0"/>
+          <a:chExt cx="0" cy="0"/>
+        </a:xfrm>
+      </p:grpSpPr>
+      <p:sp>
+        <p:nvSpPr>
+          <p:cNvPr id="240" name="Google Shape;240;g387c7329e1e_1_0"/>
+          <p:cNvSpPr txBox="1"/>
+          <p:nvPr/>
+        </p:nvSpPr>
+        <p:spPr>
+          <a:xfrm>
+            <a:off x="651878" y="260975"/>
+            <a:ext cx="4265700" cy="6491517"/>
+          </a:xfrm>
+          <a:prstGeom prst="rect">
+            <a:avLst/>
+          </a:prstGeom>
+          <a:noFill/>
+          <a:ln>
+            <a:noFill/>
+          </a:ln>
+        </p:spPr>
+        <p:txBody>
+          <a:bodyPr spcFirstLastPara="1" wrap="square" lIns="91425" tIns="45700" rIns="91425" bIns="45700" anchor="t" anchorCtr="0">
+            <a:noAutofit/>
+          </a:bodyPr>
+          <a:lstStyle/>
+          <a:p>
+            <a:pPr marL="0" marR="0" lvl="0" indent="0" algn="l" rtl="0">
+              <a:lnSpc>
+                <a:spcPct val="95000"/>
+              </a:lnSpc>
+              <a:spcBef>
+                <a:spcPts val="0"/>
+              </a:spcBef>
+              <a:spcAft>
+                <a:spcPts val="0"/>
+              </a:spcAft>
+              <a:buClr>
+                <a:schemeClr val="dk1"/>
+              </a:buClr>
+              <a:buSzPts val="1100"/>
+              <a:buFont typeface="Open Sans"/>
+              <a:buNone/>
+            </a:pPr>
+            <a:r>
+              <a:rPr lang="fr-FR" sz="1400" b="1" i="0" u="none" strike="noStrike" cap="none" dirty="0">
+                <a:solidFill>
+                  <a:schemeClr val="dk2"/>
+                </a:solidFill>
+                <a:latin typeface="Open Sans"/>
+                <a:ea typeface="Open Sans"/>
+                <a:cs typeface="Open Sans"/>
+                <a:sym typeface="Open Sans"/>
+              </a:rPr>
+              <a:t>Partenaires académiques</a:t>
+            </a:r>
+            <a:endParaRPr sz="1400" dirty="0"/>
+          </a:p>
+          <a:p>
+            <a:pPr marL="0" marR="0" lvl="0" indent="0" algn="l" rtl="0">
+              <a:lnSpc>
+                <a:spcPct val="95000"/>
+              </a:lnSpc>
+              <a:spcBef>
+                <a:spcPts val="0"/>
+              </a:spcBef>
+              <a:spcAft>
+                <a:spcPts val="0"/>
+              </a:spcAft>
+              <a:buClr>
+                <a:schemeClr val="dk1"/>
+              </a:buClr>
+              <a:buSzPts val="1100"/>
+              <a:buFont typeface="Avenir"/>
+              <a:buNone/>
+            </a:pPr>
+            <a:endParaRPr sz="1310" b="1" i="0" u="none" strike="noStrike" cap="none" dirty="0">
+              <a:solidFill>
+                <a:schemeClr val="dk2"/>
+              </a:solidFill>
+              <a:latin typeface="Open Sans"/>
+              <a:ea typeface="Open Sans"/>
+              <a:cs typeface="Open Sans"/>
+              <a:sym typeface="Open Sans"/>
+            </a:endParaRPr>
+          </a:p>
+          <a:p>
+            <a:pPr marL="0" marR="0" lvl="0" indent="0" algn="l" rtl="0">
+              <a:lnSpc>
+                <a:spcPct val="95000"/>
+              </a:lnSpc>
+              <a:spcBef>
+                <a:spcPts val="0"/>
+              </a:spcBef>
+              <a:spcAft>
+                <a:spcPts val="0"/>
+              </a:spcAft>
+              <a:buClr>
+                <a:schemeClr val="dk1"/>
+              </a:buClr>
+              <a:buSzPts val="1100"/>
+              <a:buFont typeface="Arial"/>
+              <a:buNone/>
+            </a:pPr>
+            <a:r>
+              <a:rPr lang="fr-FR" sz="1310" b="1" i="1" u="none" strike="noStrike" cap="none" dirty="0">
+                <a:solidFill>
+                  <a:schemeClr val="dk2"/>
+                </a:solidFill>
+                <a:latin typeface="Open Sans"/>
+                <a:ea typeface="Open Sans"/>
+                <a:cs typeface="Open Sans"/>
+                <a:sym typeface="Open Sans"/>
+              </a:rPr>
+              <a:t>UMR CEFE</a:t>
+            </a:r>
+            <a:endParaRPr sz="1495" dirty="0"/>
+          </a:p>
+          <a:p>
+            <a:pPr marL="0" marR="0" lvl="0" indent="457200" algn="l" rtl="0">
+              <a:lnSpc>
+                <a:spcPct val="95000"/>
+              </a:lnSpc>
+              <a:spcBef>
+                <a:spcPts val="0"/>
+              </a:spcBef>
+              <a:spcAft>
+                <a:spcPts val="0"/>
+              </a:spcAft>
+              <a:buClr>
+                <a:schemeClr val="dk1"/>
+              </a:buClr>
+              <a:buSzPts val="1100"/>
+              <a:buFont typeface="Arial"/>
+              <a:buNone/>
+            </a:pPr>
+            <a:r>
+              <a:rPr lang="fr-FR" sz="1310" i="0" u="none" strike="noStrike" cap="none" dirty="0">
+                <a:solidFill>
+                  <a:schemeClr val="dk2"/>
+                </a:solidFill>
+                <a:latin typeface="Open Sans"/>
+                <a:ea typeface="Open Sans"/>
+                <a:cs typeface="Open Sans"/>
+                <a:sym typeface="Open Sans"/>
+              </a:rPr>
+              <a:t>Olivier Gimenez (CNRS)</a:t>
+            </a:r>
+            <a:endParaRPr sz="1495" dirty="0"/>
+          </a:p>
+          <a:p>
+            <a:pPr marL="0" marR="0" lvl="0" indent="457200" algn="l" rtl="0">
+              <a:lnSpc>
+                <a:spcPct val="95000"/>
+              </a:lnSpc>
+              <a:spcBef>
+                <a:spcPts val="0"/>
+              </a:spcBef>
+              <a:spcAft>
+                <a:spcPts val="0"/>
+              </a:spcAft>
+              <a:buClr>
+                <a:schemeClr val="dk1"/>
+              </a:buClr>
+              <a:buSzPts val="1100"/>
+              <a:buFont typeface="Arial"/>
+              <a:buNone/>
+            </a:pPr>
+            <a:r>
+              <a:rPr lang="fr-FR" sz="1310" i="0" u="none" strike="noStrike" cap="none" dirty="0">
+                <a:solidFill>
+                  <a:schemeClr val="dk2"/>
+                </a:solidFill>
+                <a:latin typeface="Open Sans"/>
+                <a:ea typeface="Open Sans"/>
+                <a:cs typeface="Open Sans"/>
+                <a:sym typeface="Open Sans"/>
+              </a:rPr>
+              <a:t>Nicolas </a:t>
+            </a:r>
+            <a:r>
+              <a:rPr lang="fr-FR" sz="1310" i="0" u="none" strike="noStrike" cap="none" dirty="0" err="1">
+                <a:solidFill>
+                  <a:schemeClr val="dk2"/>
+                </a:solidFill>
+                <a:latin typeface="Open Sans"/>
+                <a:ea typeface="Open Sans"/>
+                <a:cs typeface="Open Sans"/>
+                <a:sym typeface="Open Sans"/>
+              </a:rPr>
+              <a:t>Lescureux</a:t>
+            </a:r>
+            <a:r>
+              <a:rPr lang="fr-FR" sz="1310" i="0" u="none" strike="noStrike" cap="none" dirty="0">
+                <a:solidFill>
+                  <a:schemeClr val="dk2"/>
+                </a:solidFill>
+                <a:latin typeface="Open Sans"/>
+                <a:ea typeface="Open Sans"/>
+                <a:cs typeface="Open Sans"/>
+                <a:sym typeface="Open Sans"/>
+              </a:rPr>
+              <a:t> (CNRS)</a:t>
+            </a:r>
+            <a:endParaRPr sz="1495" dirty="0"/>
+          </a:p>
+          <a:p>
+            <a:pPr marL="0" marR="0" lvl="0" indent="457200" algn="l" rtl="0">
+              <a:lnSpc>
+                <a:spcPct val="95000"/>
+              </a:lnSpc>
+              <a:spcBef>
+                <a:spcPts val="0"/>
+              </a:spcBef>
+              <a:spcAft>
+                <a:spcPts val="0"/>
+              </a:spcAft>
+              <a:buClr>
+                <a:schemeClr val="dk1"/>
+              </a:buClr>
+              <a:buSzPts val="1100"/>
+              <a:buFont typeface="Arial"/>
+              <a:buNone/>
+            </a:pPr>
+            <a:r>
+              <a:rPr lang="fr-FR" sz="1310" i="0" u="none" strike="noStrike" cap="none" dirty="0">
+                <a:solidFill>
+                  <a:schemeClr val="dk2"/>
+                </a:solidFill>
+                <a:latin typeface="Open Sans"/>
+                <a:ea typeface="Open Sans"/>
+                <a:cs typeface="Open Sans"/>
+                <a:sym typeface="Open Sans"/>
+              </a:rPr>
+              <a:t>Romain Duda (CNRS)</a:t>
+            </a:r>
+            <a:endParaRPr sz="1495" dirty="0"/>
+          </a:p>
+          <a:p>
+            <a:pPr marL="0" marR="0" lvl="0" indent="457200" algn="l" rtl="0">
+              <a:lnSpc>
+                <a:spcPct val="95000"/>
+              </a:lnSpc>
+              <a:spcBef>
+                <a:spcPts val="0"/>
+              </a:spcBef>
+              <a:spcAft>
+                <a:spcPts val="0"/>
+              </a:spcAft>
+              <a:buClr>
+                <a:schemeClr val="dk1"/>
+              </a:buClr>
+              <a:buSzPts val="1100"/>
+              <a:buFont typeface="Arial"/>
+              <a:buNone/>
+            </a:pPr>
+            <a:r>
+              <a:rPr lang="fr-FR" sz="1310" i="0" u="none" strike="noStrike" cap="none" dirty="0">
+                <a:solidFill>
+                  <a:schemeClr val="dk2"/>
+                </a:solidFill>
+                <a:latin typeface="Open Sans"/>
+                <a:ea typeface="Open Sans"/>
+                <a:cs typeface="Open Sans"/>
+                <a:sym typeface="Open Sans"/>
+              </a:rPr>
+              <a:t>Raphaël </a:t>
+            </a:r>
+            <a:r>
+              <a:rPr lang="fr-FR" sz="1310" i="0" u="none" strike="noStrike" cap="none" dirty="0" err="1">
+                <a:solidFill>
+                  <a:schemeClr val="dk2"/>
+                </a:solidFill>
+                <a:latin typeface="Open Sans"/>
+                <a:ea typeface="Open Sans"/>
+                <a:cs typeface="Open Sans"/>
+                <a:sym typeface="Open Sans"/>
+              </a:rPr>
+              <a:t>Mathevet</a:t>
+            </a:r>
+            <a:r>
+              <a:rPr lang="fr-FR" sz="1310" i="0" u="none" strike="noStrike" cap="none" dirty="0">
+                <a:solidFill>
+                  <a:schemeClr val="dk2"/>
+                </a:solidFill>
+                <a:latin typeface="Open Sans"/>
+                <a:ea typeface="Open Sans"/>
+                <a:cs typeface="Open Sans"/>
+                <a:sym typeface="Open Sans"/>
+              </a:rPr>
+              <a:t> (CNRS)</a:t>
+            </a:r>
+            <a:endParaRPr sz="1495" dirty="0"/>
+          </a:p>
+          <a:p>
+            <a:pPr marL="0" marR="0" lvl="0" indent="457200" algn="l" rtl="0">
+              <a:lnSpc>
+                <a:spcPct val="95000"/>
+              </a:lnSpc>
+              <a:spcBef>
+                <a:spcPts val="0"/>
+              </a:spcBef>
+              <a:spcAft>
+                <a:spcPts val="0"/>
+              </a:spcAft>
+              <a:buClr>
+                <a:schemeClr val="dk1"/>
+              </a:buClr>
+              <a:buSzPts val="1100"/>
+              <a:buFont typeface="Arial"/>
+              <a:buNone/>
+            </a:pPr>
+            <a:r>
+              <a:rPr lang="fr-FR" sz="1310" i="0" u="none" strike="noStrike" cap="none" dirty="0">
+                <a:solidFill>
+                  <a:schemeClr val="dk2"/>
+                </a:solidFill>
+                <a:latin typeface="Open Sans"/>
+                <a:ea typeface="Open Sans"/>
+                <a:cs typeface="Open Sans"/>
+                <a:sym typeface="Open Sans"/>
+              </a:rPr>
+              <a:t>Anne Charpentier (UM)</a:t>
+            </a:r>
+            <a:endParaRPr sz="1495" dirty="0"/>
+          </a:p>
+          <a:p>
+            <a:pPr marL="0" marR="0" lvl="0" indent="457200" algn="l" rtl="0">
+              <a:lnSpc>
+                <a:spcPct val="95000"/>
+              </a:lnSpc>
+              <a:spcBef>
+                <a:spcPts val="0"/>
+              </a:spcBef>
+              <a:spcAft>
+                <a:spcPts val="0"/>
+              </a:spcAft>
+              <a:buClr>
+                <a:schemeClr val="dk1"/>
+              </a:buClr>
+              <a:buSzPts val="1100"/>
+              <a:buFont typeface="Arial"/>
+              <a:buNone/>
+            </a:pPr>
+            <a:r>
+              <a:rPr lang="fr-FR" sz="1310" i="0" u="none" strike="noStrike" cap="none" dirty="0">
+                <a:solidFill>
+                  <a:schemeClr val="dk2"/>
+                </a:solidFill>
+                <a:latin typeface="Open Sans"/>
+                <a:ea typeface="Open Sans"/>
+                <a:cs typeface="Open Sans"/>
+                <a:sym typeface="Open Sans"/>
+              </a:rPr>
+              <a:t>Samuel Perret (CNRS)</a:t>
+            </a:r>
+            <a:endParaRPr sz="1495" dirty="0"/>
+          </a:p>
+          <a:p>
+            <a:pPr marL="0" marR="0" lvl="0" indent="457200" algn="l" rtl="0">
+              <a:lnSpc>
+                <a:spcPct val="95000"/>
+              </a:lnSpc>
+              <a:spcBef>
+                <a:spcPts val="0"/>
+              </a:spcBef>
+              <a:spcAft>
+                <a:spcPts val="0"/>
+              </a:spcAft>
+              <a:buClr>
+                <a:schemeClr val="dk1"/>
+              </a:buClr>
+              <a:buSzPts val="1100"/>
+              <a:buFont typeface="Open Sans"/>
+              <a:buNone/>
+            </a:pPr>
+            <a:r>
+              <a:rPr lang="fr-FR" sz="1310" i="0" u="none" strike="noStrike" cap="none" dirty="0">
+                <a:solidFill>
+                  <a:schemeClr val="dk2"/>
+                </a:solidFill>
+                <a:latin typeface="Open Sans"/>
+                <a:ea typeface="Open Sans"/>
+                <a:cs typeface="Open Sans"/>
+                <a:sym typeface="Open Sans"/>
+              </a:rPr>
+              <a:t>Christophe de Franceschi (CNRS)</a:t>
+            </a:r>
+            <a:endParaRPr sz="1495" dirty="0"/>
+          </a:p>
+          <a:p>
+            <a:pPr marL="0" marR="0" lvl="0" indent="457200" algn="l" rtl="0">
+              <a:lnSpc>
+                <a:spcPct val="95000"/>
+              </a:lnSpc>
+              <a:spcBef>
+                <a:spcPts val="0"/>
+              </a:spcBef>
+              <a:spcAft>
+                <a:spcPts val="0"/>
+              </a:spcAft>
+              <a:buClr>
+                <a:schemeClr val="dk1"/>
+              </a:buClr>
+              <a:buSzPts val="1100"/>
+              <a:buFont typeface="Open Sans"/>
+              <a:buNone/>
+            </a:pPr>
+            <a:r>
+              <a:rPr lang="fr-FR" sz="1310" i="0" u="none" strike="noStrike" cap="none" dirty="0">
+                <a:solidFill>
+                  <a:schemeClr val="dk2"/>
+                </a:solidFill>
+                <a:latin typeface="Open Sans"/>
+                <a:ea typeface="Open Sans"/>
+                <a:cs typeface="Open Sans"/>
+                <a:sym typeface="Open Sans"/>
+              </a:rPr>
+              <a:t>Annick Lucas (CNRS)</a:t>
+            </a:r>
+            <a:endParaRPr sz="1495" dirty="0"/>
+          </a:p>
+          <a:p>
+            <a:pPr marL="0" marR="0" lvl="0" indent="457200" algn="l" rtl="0">
+              <a:lnSpc>
+                <a:spcPct val="95000"/>
+              </a:lnSpc>
+              <a:spcBef>
+                <a:spcPts val="0"/>
+              </a:spcBef>
+              <a:spcAft>
+                <a:spcPts val="0"/>
+              </a:spcAft>
+              <a:buClr>
+                <a:schemeClr val="dk1"/>
+              </a:buClr>
+              <a:buSzPts val="1100"/>
+              <a:buFont typeface="Open Sans"/>
+              <a:buNone/>
+            </a:pPr>
+            <a:r>
+              <a:rPr lang="fr-FR" sz="1310" i="0" u="none" strike="noStrike" cap="none" dirty="0">
+                <a:solidFill>
+                  <a:schemeClr val="dk2"/>
+                </a:solidFill>
+                <a:latin typeface="Open Sans"/>
+                <a:ea typeface="Open Sans"/>
+                <a:cs typeface="Open Sans"/>
+                <a:sym typeface="Open Sans"/>
+              </a:rPr>
+              <a:t>Camille Mottier (UM)</a:t>
+            </a:r>
+            <a:endParaRPr sz="1495" dirty="0"/>
+          </a:p>
+          <a:p>
+            <a:pPr marL="0" marR="0" lvl="0" indent="457200" algn="l" rtl="0">
+              <a:lnSpc>
+                <a:spcPct val="95000"/>
+              </a:lnSpc>
+              <a:spcBef>
+                <a:spcPts val="0"/>
+              </a:spcBef>
+              <a:spcAft>
+                <a:spcPts val="0"/>
+              </a:spcAft>
+              <a:buClr>
+                <a:schemeClr val="dk1"/>
+              </a:buClr>
+              <a:buSzPts val="1100"/>
+              <a:buFont typeface="Open Sans"/>
+              <a:buNone/>
+            </a:pPr>
+            <a:r>
+              <a:rPr lang="fr-FR" sz="1310" i="0" u="none" strike="noStrike" cap="none" dirty="0">
+                <a:solidFill>
+                  <a:schemeClr val="dk2"/>
+                </a:solidFill>
+                <a:latin typeface="Open Sans"/>
+                <a:ea typeface="Open Sans"/>
+                <a:cs typeface="Open Sans"/>
+                <a:sym typeface="Open Sans"/>
+              </a:rPr>
+              <a:t>Camille Giacomel (UM)</a:t>
+            </a:r>
+            <a:endParaRPr sz="1495" dirty="0"/>
+          </a:p>
+          <a:p>
+            <a:pPr marL="0" marR="0" lvl="0" indent="457200" algn="l" rtl="0">
+              <a:lnSpc>
+                <a:spcPct val="95000"/>
+              </a:lnSpc>
+              <a:spcBef>
+                <a:spcPts val="0"/>
+              </a:spcBef>
+              <a:spcAft>
+                <a:spcPts val="0"/>
+              </a:spcAft>
+              <a:buClr>
+                <a:schemeClr val="dk1"/>
+              </a:buClr>
+              <a:buSzPts val="1100"/>
+              <a:buFont typeface="Avenir"/>
+              <a:buNone/>
+            </a:pPr>
+            <a:endParaRPr sz="1310" b="1" i="0" u="none" strike="noStrike" cap="none" dirty="0">
+              <a:solidFill>
+                <a:schemeClr val="dk2"/>
+              </a:solidFill>
+              <a:latin typeface="Open Sans"/>
+              <a:ea typeface="Open Sans"/>
+              <a:cs typeface="Open Sans"/>
+              <a:sym typeface="Open Sans"/>
+            </a:endParaRPr>
+          </a:p>
+          <a:p>
+            <a:pPr marL="0" marR="0" lvl="0" indent="457200" algn="l" rtl="0">
+              <a:lnSpc>
+                <a:spcPct val="95000"/>
+              </a:lnSpc>
+              <a:spcBef>
+                <a:spcPts val="0"/>
+              </a:spcBef>
+              <a:spcAft>
+                <a:spcPts val="0"/>
+              </a:spcAft>
+              <a:buClr>
+                <a:schemeClr val="dk1"/>
+              </a:buClr>
+              <a:buSzPts val="1100"/>
+              <a:buFont typeface="Arial"/>
+              <a:buNone/>
+            </a:pPr>
+            <a:endParaRPr sz="1310" b="1" i="0" u="none" strike="noStrike" cap="none" dirty="0">
+              <a:solidFill>
+                <a:schemeClr val="dk2"/>
+              </a:solidFill>
+              <a:latin typeface="Open Sans"/>
+              <a:ea typeface="Open Sans"/>
+              <a:cs typeface="Open Sans"/>
+              <a:sym typeface="Open Sans"/>
+            </a:endParaRPr>
+          </a:p>
+          <a:p>
+            <a:pPr marL="0" marR="0" lvl="0" indent="0" algn="l" rtl="0">
+              <a:lnSpc>
+                <a:spcPct val="95000"/>
+              </a:lnSpc>
+              <a:spcBef>
+                <a:spcPts val="0"/>
+              </a:spcBef>
+              <a:spcAft>
+                <a:spcPts val="0"/>
+              </a:spcAft>
+              <a:buClr>
+                <a:schemeClr val="dk1"/>
+              </a:buClr>
+              <a:buSzPts val="1100"/>
+              <a:buFont typeface="Arial"/>
+              <a:buNone/>
+            </a:pPr>
+            <a:r>
+              <a:rPr lang="fr-FR" sz="1310" b="1" i="1" u="none" strike="noStrike" cap="none" dirty="0">
+                <a:solidFill>
+                  <a:schemeClr val="dk2"/>
+                </a:solidFill>
+                <a:latin typeface="Open Sans"/>
+                <a:ea typeface="Open Sans"/>
+                <a:cs typeface="Open Sans"/>
+                <a:sym typeface="Open Sans"/>
+              </a:rPr>
+              <a:t>UMR CBGP</a:t>
+            </a:r>
+            <a:endParaRPr sz="1495" dirty="0"/>
+          </a:p>
+          <a:p>
+            <a:pPr marL="498475" marR="0" lvl="0" indent="-53975" algn="l" rtl="0">
+              <a:lnSpc>
+                <a:spcPct val="95000"/>
+              </a:lnSpc>
+              <a:spcBef>
+                <a:spcPts val="0"/>
+              </a:spcBef>
+              <a:spcAft>
+                <a:spcPts val="0"/>
+              </a:spcAft>
+              <a:buClr>
+                <a:schemeClr val="dk1"/>
+              </a:buClr>
+              <a:buSzPts val="1100"/>
+              <a:buFont typeface="Arial"/>
+              <a:buNone/>
+            </a:pPr>
+            <a:r>
+              <a:rPr lang="fr-FR" sz="1310" i="0" u="none" strike="noStrike" cap="none" dirty="0">
+                <a:solidFill>
+                  <a:schemeClr val="dk2"/>
+                </a:solidFill>
+                <a:latin typeface="Open Sans"/>
+                <a:ea typeface="Open Sans"/>
+                <a:cs typeface="Open Sans"/>
+                <a:sym typeface="Open Sans"/>
+              </a:rPr>
+              <a:t>Nathalie Charbonnel (INRAE)</a:t>
+            </a:r>
+            <a:endParaRPr sz="1495" dirty="0"/>
+          </a:p>
+          <a:p>
+            <a:pPr marL="498475" marR="0" lvl="0" indent="-53975" algn="l" rtl="0">
+              <a:lnSpc>
+                <a:spcPct val="95000"/>
+              </a:lnSpc>
+              <a:spcBef>
+                <a:spcPts val="0"/>
+              </a:spcBef>
+              <a:spcAft>
+                <a:spcPts val="0"/>
+              </a:spcAft>
+              <a:buClr>
+                <a:schemeClr val="dk1"/>
+              </a:buClr>
+              <a:buSzPts val="1100"/>
+              <a:buFont typeface="Arial"/>
+              <a:buNone/>
+            </a:pPr>
+            <a:r>
+              <a:rPr lang="fr-FR" sz="1310" i="0" u="none" strike="noStrike" cap="none" dirty="0">
+                <a:solidFill>
+                  <a:schemeClr val="dk2"/>
+                </a:solidFill>
+                <a:latin typeface="Open Sans"/>
+                <a:ea typeface="Open Sans"/>
+                <a:cs typeface="Open Sans"/>
+                <a:sym typeface="Open Sans"/>
+              </a:rPr>
+              <a:t>Guillaume Castel (INRAE)</a:t>
+            </a:r>
+            <a:endParaRPr sz="1495" dirty="0"/>
+          </a:p>
+          <a:p>
+            <a:pPr marL="498475" marR="0" lvl="0" indent="-53975" algn="l" rtl="0">
+              <a:lnSpc>
+                <a:spcPct val="95000"/>
+              </a:lnSpc>
+              <a:spcBef>
+                <a:spcPts val="0"/>
+              </a:spcBef>
+              <a:spcAft>
+                <a:spcPts val="0"/>
+              </a:spcAft>
+              <a:buClr>
+                <a:schemeClr val="dk1"/>
+              </a:buClr>
+              <a:buSzPts val="1100"/>
+              <a:buFont typeface="Arial"/>
+              <a:buNone/>
+            </a:pPr>
+            <a:r>
+              <a:rPr lang="fr-FR" sz="1310" i="0" u="none" strike="noStrike" cap="none" dirty="0">
+                <a:solidFill>
+                  <a:schemeClr val="dk2"/>
+                </a:solidFill>
+                <a:latin typeface="Open Sans"/>
+                <a:ea typeface="Open Sans"/>
+                <a:cs typeface="Open Sans"/>
+                <a:sym typeface="Open Sans"/>
+              </a:rPr>
+              <a:t>Karine Berthier (INRAE)</a:t>
+            </a:r>
+            <a:endParaRPr sz="1495" dirty="0"/>
+          </a:p>
+          <a:p>
+            <a:pPr marL="0" marR="0" lvl="0" indent="457200" algn="l" rtl="0">
+              <a:lnSpc>
+                <a:spcPct val="95000"/>
+              </a:lnSpc>
+              <a:spcBef>
+                <a:spcPts val="0"/>
+              </a:spcBef>
+              <a:spcAft>
+                <a:spcPts val="0"/>
+              </a:spcAft>
+              <a:buClr>
+                <a:schemeClr val="dk1"/>
+              </a:buClr>
+              <a:buSzPts val="1100"/>
+              <a:buFont typeface="Arial"/>
+              <a:buNone/>
+            </a:pPr>
+            <a:r>
+              <a:rPr lang="fr-FR" sz="1310" i="0" u="none" strike="noStrike" cap="none" dirty="0">
+                <a:solidFill>
+                  <a:schemeClr val="dk2"/>
+                </a:solidFill>
+                <a:latin typeface="Open Sans"/>
+                <a:ea typeface="Open Sans"/>
+                <a:cs typeface="Open Sans"/>
+                <a:sym typeface="Open Sans"/>
+              </a:rPr>
+              <a:t>Maxime </a:t>
+            </a:r>
+            <a:r>
+              <a:rPr lang="fr-FR" sz="1310" i="0" u="none" strike="noStrike" cap="none" dirty="0" err="1">
+                <a:solidFill>
+                  <a:schemeClr val="dk2"/>
+                </a:solidFill>
+                <a:latin typeface="Open Sans"/>
+                <a:ea typeface="Open Sans"/>
+                <a:cs typeface="Open Sans"/>
+                <a:sym typeface="Open Sans"/>
+              </a:rPr>
+              <a:t>Galan</a:t>
+            </a:r>
+            <a:r>
+              <a:rPr lang="fr-FR" sz="1310" i="0" u="none" strike="noStrike" cap="none" dirty="0">
+                <a:solidFill>
+                  <a:schemeClr val="dk2"/>
+                </a:solidFill>
+                <a:latin typeface="Open Sans"/>
+                <a:ea typeface="Open Sans"/>
+                <a:cs typeface="Open Sans"/>
+                <a:sym typeface="Open Sans"/>
+              </a:rPr>
+              <a:t> (INRAE)</a:t>
+            </a:r>
+            <a:endParaRPr sz="1495" dirty="0"/>
+          </a:p>
+          <a:p>
+            <a:pPr marL="450000" marR="0" lvl="0" indent="0" algn="l" rtl="0">
+              <a:lnSpc>
+                <a:spcPct val="95000"/>
+              </a:lnSpc>
+              <a:spcBef>
+                <a:spcPts val="0"/>
+              </a:spcBef>
+              <a:spcAft>
+                <a:spcPts val="0"/>
+              </a:spcAft>
+              <a:buClr>
+                <a:schemeClr val="dk1"/>
+              </a:buClr>
+              <a:buSzPts val="1100"/>
+              <a:buFont typeface="Arial"/>
+              <a:buNone/>
+            </a:pPr>
+            <a:r>
+              <a:rPr lang="fr-FR" sz="1310" i="0" u="none" strike="noStrike" cap="none" dirty="0">
+                <a:solidFill>
+                  <a:schemeClr val="dk2"/>
+                </a:solidFill>
+                <a:latin typeface="Open Sans"/>
+                <a:ea typeface="Open Sans"/>
+                <a:cs typeface="Open Sans"/>
+                <a:sym typeface="Open Sans"/>
+              </a:rPr>
+              <a:t>Sylvain </a:t>
+            </a:r>
+            <a:r>
+              <a:rPr lang="fr-FR" sz="1310" i="0" u="none" strike="noStrike" cap="none" dirty="0" err="1">
+                <a:solidFill>
+                  <a:schemeClr val="dk2"/>
+                </a:solidFill>
+                <a:latin typeface="Open Sans"/>
+                <a:ea typeface="Open Sans"/>
+                <a:cs typeface="Open Sans"/>
+                <a:sym typeface="Open Sans"/>
+              </a:rPr>
+              <a:t>Piry</a:t>
+            </a:r>
+            <a:r>
+              <a:rPr lang="fr-FR" sz="1310" i="0" u="none" strike="noStrike" cap="none" dirty="0">
+                <a:solidFill>
+                  <a:schemeClr val="dk2"/>
+                </a:solidFill>
+                <a:latin typeface="Open Sans"/>
+                <a:ea typeface="Open Sans"/>
+                <a:cs typeface="Open Sans"/>
+                <a:sym typeface="Open Sans"/>
+              </a:rPr>
+              <a:t> (INRAE)</a:t>
+            </a:r>
+            <a:endParaRPr sz="1495" dirty="0"/>
+          </a:p>
+          <a:p>
+            <a:pPr marL="450000" marR="0" lvl="0" indent="0" algn="l" rtl="0">
+              <a:lnSpc>
+                <a:spcPct val="95000"/>
+              </a:lnSpc>
+              <a:spcBef>
+                <a:spcPts val="0"/>
+              </a:spcBef>
+              <a:spcAft>
+                <a:spcPts val="0"/>
+              </a:spcAft>
+              <a:buClr>
+                <a:schemeClr val="dk1"/>
+              </a:buClr>
+              <a:buSzPts val="1100"/>
+              <a:buFont typeface="Arial"/>
+              <a:buNone/>
+            </a:pPr>
+            <a:r>
+              <a:rPr lang="fr-FR" sz="1310" i="0" u="none" strike="noStrike" cap="none" dirty="0">
+                <a:solidFill>
+                  <a:schemeClr val="dk2"/>
+                </a:solidFill>
+                <a:latin typeface="Open Sans"/>
+                <a:ea typeface="Open Sans"/>
+                <a:cs typeface="Open Sans"/>
+                <a:sym typeface="Open Sans"/>
+              </a:rPr>
+              <a:t>Philippe Gauthier (IRD)</a:t>
+            </a:r>
+            <a:endParaRPr sz="1495" dirty="0"/>
+          </a:p>
+          <a:p>
+            <a:pPr marL="450000" marR="0" lvl="0" indent="0" algn="l" rtl="0">
+              <a:lnSpc>
+                <a:spcPct val="95000"/>
+              </a:lnSpc>
+              <a:spcBef>
+                <a:spcPts val="0"/>
+              </a:spcBef>
+              <a:spcAft>
+                <a:spcPts val="0"/>
+              </a:spcAft>
+              <a:buClr>
+                <a:schemeClr val="dk1"/>
+              </a:buClr>
+              <a:buSzPts val="1100"/>
+              <a:buFont typeface="Arial"/>
+              <a:buNone/>
+            </a:pPr>
+            <a:r>
+              <a:rPr lang="fr-FR" sz="1310" i="0" u="none" strike="noStrike" cap="none" dirty="0">
+                <a:solidFill>
+                  <a:schemeClr val="dk2"/>
+                </a:solidFill>
+                <a:latin typeface="Open Sans"/>
+                <a:ea typeface="Open Sans"/>
+                <a:cs typeface="Open Sans"/>
+                <a:sym typeface="Open Sans"/>
+              </a:rPr>
+              <a:t>Emmanuelle </a:t>
+            </a:r>
+            <a:r>
+              <a:rPr lang="fr-FR" sz="1310" i="0" u="none" strike="noStrike" cap="none" dirty="0" err="1">
+                <a:solidFill>
+                  <a:schemeClr val="dk2"/>
+                </a:solidFill>
+                <a:latin typeface="Open Sans"/>
+                <a:ea typeface="Open Sans"/>
+                <a:cs typeface="Open Sans"/>
+                <a:sym typeface="Open Sans"/>
+              </a:rPr>
+              <a:t>Artige</a:t>
+            </a:r>
+            <a:r>
+              <a:rPr lang="fr-FR" sz="1310" i="0" u="none" strike="noStrike" cap="none" dirty="0">
+                <a:solidFill>
+                  <a:schemeClr val="dk2"/>
+                </a:solidFill>
+                <a:latin typeface="Open Sans"/>
+                <a:ea typeface="Open Sans"/>
+                <a:cs typeface="Open Sans"/>
+                <a:sym typeface="Open Sans"/>
+              </a:rPr>
+              <a:t> (INRAE)</a:t>
+            </a:r>
+            <a:endParaRPr sz="1495" dirty="0"/>
+          </a:p>
+          <a:p>
+            <a:pPr marL="450000" marR="0" lvl="0" indent="0" algn="l" rtl="0">
+              <a:lnSpc>
+                <a:spcPct val="95000"/>
+              </a:lnSpc>
+              <a:spcBef>
+                <a:spcPts val="0"/>
+              </a:spcBef>
+              <a:spcAft>
+                <a:spcPts val="0"/>
+              </a:spcAft>
+              <a:buClr>
+                <a:schemeClr val="dk1"/>
+              </a:buClr>
+              <a:buSzPts val="1100"/>
+              <a:buFont typeface="Arial"/>
+              <a:buNone/>
+            </a:pPr>
+            <a:r>
+              <a:rPr lang="fr-FR" sz="1310" i="0" u="none" strike="noStrike" cap="none" dirty="0">
+                <a:solidFill>
+                  <a:schemeClr val="dk2"/>
+                </a:solidFill>
+                <a:latin typeface="Open Sans"/>
+                <a:ea typeface="Open Sans"/>
+                <a:cs typeface="Open Sans"/>
+                <a:sym typeface="Open Sans"/>
+              </a:rPr>
+              <a:t>Anne Loiseau (INRAE)</a:t>
+            </a:r>
+            <a:endParaRPr sz="1495" dirty="0"/>
+          </a:p>
+          <a:p>
+            <a:pPr marL="450000" marR="0" lvl="0" indent="0" algn="l" rtl="0">
+              <a:lnSpc>
+                <a:spcPct val="95000"/>
+              </a:lnSpc>
+              <a:spcBef>
+                <a:spcPts val="0"/>
+              </a:spcBef>
+              <a:spcAft>
+                <a:spcPts val="0"/>
+              </a:spcAft>
+              <a:buClr>
+                <a:schemeClr val="dk1"/>
+              </a:buClr>
+              <a:buSzPts val="1100"/>
+              <a:buFont typeface="Arial"/>
+              <a:buNone/>
+            </a:pPr>
+            <a:r>
+              <a:rPr lang="fr-FR" sz="1310" i="0" u="none" strike="noStrike" cap="none" dirty="0">
+                <a:solidFill>
+                  <a:schemeClr val="dk2"/>
+                </a:solidFill>
+                <a:latin typeface="Open Sans"/>
+                <a:ea typeface="Open Sans"/>
+                <a:cs typeface="Open Sans"/>
+                <a:sym typeface="Open Sans"/>
+              </a:rPr>
+              <a:t>Caroline </a:t>
+            </a:r>
+            <a:r>
+              <a:rPr lang="fr-FR" sz="1310" i="0" u="none" strike="noStrike" cap="none" dirty="0" err="1">
+                <a:solidFill>
+                  <a:schemeClr val="dk2"/>
+                </a:solidFill>
+                <a:latin typeface="Open Sans"/>
+                <a:ea typeface="Open Sans"/>
+                <a:cs typeface="Open Sans"/>
+                <a:sym typeface="Open Sans"/>
+              </a:rPr>
+              <a:t>Tatard</a:t>
+            </a:r>
+            <a:r>
+              <a:rPr lang="fr-FR" sz="1310" i="0" u="none" strike="noStrike" cap="none" dirty="0">
+                <a:solidFill>
+                  <a:schemeClr val="dk2"/>
+                </a:solidFill>
+                <a:latin typeface="Open Sans"/>
+                <a:ea typeface="Open Sans"/>
+                <a:cs typeface="Open Sans"/>
+                <a:sym typeface="Open Sans"/>
+              </a:rPr>
+              <a:t> (INRAE)</a:t>
+            </a:r>
+            <a:endParaRPr sz="1495" dirty="0"/>
+          </a:p>
+          <a:p>
+            <a:pPr marL="450000" marR="0" lvl="0" indent="0" algn="l" rtl="0">
+              <a:lnSpc>
+                <a:spcPct val="95000"/>
+              </a:lnSpc>
+              <a:spcBef>
+                <a:spcPts val="0"/>
+              </a:spcBef>
+              <a:spcAft>
+                <a:spcPts val="0"/>
+              </a:spcAft>
+              <a:buClr>
+                <a:schemeClr val="dk1"/>
+              </a:buClr>
+              <a:buSzPts val="1100"/>
+              <a:buFont typeface="Arial"/>
+              <a:buNone/>
+            </a:pPr>
+            <a:r>
+              <a:rPr lang="fr-FR" sz="1310" i="0" u="none" strike="noStrike" cap="none" dirty="0">
+                <a:solidFill>
+                  <a:schemeClr val="dk2"/>
+                </a:solidFill>
+                <a:latin typeface="Open Sans"/>
+                <a:ea typeface="Open Sans"/>
+                <a:cs typeface="Open Sans"/>
+                <a:sym typeface="Open Sans"/>
+              </a:rPr>
+              <a:t>Julien Pradel (INRAE)</a:t>
+            </a:r>
+            <a:endParaRPr sz="1495" dirty="0"/>
+          </a:p>
+          <a:p>
+            <a:pPr marL="450000" marR="0" lvl="0" indent="0" algn="l" rtl="0">
+              <a:lnSpc>
+                <a:spcPct val="95000"/>
+              </a:lnSpc>
+              <a:spcBef>
+                <a:spcPts val="0"/>
+              </a:spcBef>
+              <a:spcAft>
+                <a:spcPts val="0"/>
+              </a:spcAft>
+              <a:buClr>
+                <a:schemeClr val="dk1"/>
+              </a:buClr>
+              <a:buSzPts val="1100"/>
+              <a:buFont typeface="Arial"/>
+              <a:buNone/>
+            </a:pPr>
+            <a:r>
+              <a:rPr lang="fr-FR" sz="1310" i="0" u="none" strike="noStrike" cap="none" dirty="0">
+                <a:solidFill>
+                  <a:schemeClr val="dk2"/>
+                </a:solidFill>
+                <a:latin typeface="Open Sans"/>
+                <a:ea typeface="Open Sans"/>
+                <a:cs typeface="Open Sans"/>
+                <a:sym typeface="Open Sans"/>
+              </a:rPr>
+              <a:t>Julie Blanchet (UM)</a:t>
+            </a:r>
+            <a:endParaRPr sz="1495" dirty="0"/>
+          </a:p>
+          <a:p>
+            <a:pPr marL="450000" marR="0" lvl="0" indent="0" algn="l" rtl="0">
+              <a:lnSpc>
+                <a:spcPct val="95000"/>
+              </a:lnSpc>
+              <a:spcBef>
+                <a:spcPts val="0"/>
+              </a:spcBef>
+              <a:spcAft>
+                <a:spcPts val="0"/>
+              </a:spcAft>
+              <a:buClr>
+                <a:schemeClr val="dk1"/>
+              </a:buClr>
+              <a:buSzPts val="1100"/>
+              <a:buFont typeface="Arial"/>
+              <a:buNone/>
+            </a:pPr>
+            <a:endParaRPr sz="1310" b="1" i="0" u="none" strike="noStrike" cap="none" dirty="0">
+              <a:solidFill>
+                <a:schemeClr val="dk2"/>
+              </a:solidFill>
+              <a:latin typeface="Open Sans"/>
+              <a:ea typeface="Open Sans"/>
+              <a:cs typeface="Open Sans"/>
+              <a:sym typeface="Open Sans"/>
+            </a:endParaRPr>
+          </a:p>
+          <a:p>
+            <a:pPr marL="0" marR="0" lvl="0" indent="0" algn="l" rtl="0">
+              <a:lnSpc>
+                <a:spcPct val="95000"/>
+              </a:lnSpc>
+              <a:spcBef>
+                <a:spcPts val="0"/>
+              </a:spcBef>
+              <a:spcAft>
+                <a:spcPts val="0"/>
+              </a:spcAft>
+              <a:buClr>
+                <a:schemeClr val="dk1"/>
+              </a:buClr>
+              <a:buSzPts val="1100"/>
+              <a:buFont typeface="Arial"/>
+              <a:buNone/>
+            </a:pPr>
+            <a:r>
+              <a:rPr lang="fr-FR" sz="1310" b="1" i="1" u="none" strike="noStrike" cap="none" dirty="0">
+                <a:solidFill>
+                  <a:schemeClr val="dk2"/>
+                </a:solidFill>
+                <a:latin typeface="Open Sans"/>
+                <a:ea typeface="Open Sans"/>
+                <a:cs typeface="Open Sans"/>
+                <a:sym typeface="Open Sans"/>
+              </a:rPr>
+              <a:t>UMR MIVEGEC</a:t>
+            </a:r>
+            <a:endParaRPr sz="1495" dirty="0"/>
+          </a:p>
+          <a:p>
+            <a:pPr marL="498475" marR="0" lvl="0" indent="-53975" algn="l" rtl="0">
+              <a:lnSpc>
+                <a:spcPct val="95000"/>
+              </a:lnSpc>
+              <a:spcBef>
+                <a:spcPts val="0"/>
+              </a:spcBef>
+              <a:spcAft>
+                <a:spcPts val="0"/>
+              </a:spcAft>
+              <a:buClr>
+                <a:schemeClr val="dk1"/>
+              </a:buClr>
+              <a:buSzPts val="1100"/>
+              <a:buFont typeface="Arial"/>
+              <a:buNone/>
+            </a:pPr>
+            <a:r>
+              <a:rPr lang="fr-FR" sz="1310" i="0" u="none" strike="noStrike" cap="none" dirty="0">
+                <a:solidFill>
+                  <a:schemeClr val="dk2"/>
+                </a:solidFill>
+                <a:latin typeface="Open Sans"/>
+                <a:ea typeface="Open Sans"/>
+                <a:cs typeface="Open Sans"/>
+                <a:sym typeface="Open Sans"/>
+              </a:rPr>
+              <a:t>Julio </a:t>
+            </a:r>
+            <a:r>
+              <a:rPr lang="fr-FR" sz="1310" i="0" u="none" strike="noStrike" cap="none" dirty="0" err="1">
+                <a:solidFill>
+                  <a:schemeClr val="dk2"/>
+                </a:solidFill>
+                <a:latin typeface="Open Sans"/>
+                <a:ea typeface="Open Sans"/>
+                <a:cs typeface="Open Sans"/>
+                <a:sym typeface="Open Sans"/>
+              </a:rPr>
+              <a:t>Benavides</a:t>
+            </a:r>
+            <a:r>
+              <a:rPr lang="fr-FR" sz="1310" i="0" u="none" strike="noStrike" cap="none" dirty="0">
+                <a:solidFill>
+                  <a:schemeClr val="dk2"/>
+                </a:solidFill>
+                <a:latin typeface="Open Sans"/>
+                <a:ea typeface="Open Sans"/>
+                <a:cs typeface="Open Sans"/>
+                <a:sym typeface="Open Sans"/>
+              </a:rPr>
+              <a:t> (IRD)</a:t>
+            </a:r>
+          </a:p>
+          <a:p>
+            <a:pPr marL="498475" marR="0" lvl="0" indent="-53975" algn="l" rtl="0">
+              <a:lnSpc>
+                <a:spcPct val="95000"/>
+              </a:lnSpc>
+              <a:spcBef>
+                <a:spcPts val="0"/>
+              </a:spcBef>
+              <a:spcAft>
+                <a:spcPts val="0"/>
+              </a:spcAft>
+              <a:buClr>
+                <a:schemeClr val="dk1"/>
+              </a:buClr>
+              <a:buSzPts val="1100"/>
+              <a:buFont typeface="Arial"/>
+              <a:buNone/>
+            </a:pPr>
+            <a:endParaRPr lang="fr-FR" sz="1310" dirty="0">
+              <a:solidFill>
+                <a:schemeClr val="dk2"/>
+              </a:solidFill>
+              <a:latin typeface="Open Sans"/>
+              <a:ea typeface="Open Sans"/>
+              <a:cs typeface="Open Sans"/>
+              <a:sym typeface="Open Sans"/>
+            </a:endParaRPr>
+          </a:p>
+          <a:p>
+            <a:pPr>
+              <a:lnSpc>
+                <a:spcPct val="95000"/>
+              </a:lnSpc>
+              <a:buClr>
+                <a:schemeClr val="dk1"/>
+              </a:buClr>
+              <a:buSzPts val="1100"/>
+            </a:pPr>
+            <a:r>
+              <a:rPr lang="fr-FR" sz="1310" b="1" i="1" dirty="0">
+                <a:solidFill>
+                  <a:schemeClr val="dk2"/>
+                </a:solidFill>
+                <a:latin typeface="Open Sans"/>
+                <a:ea typeface="Open Sans"/>
+                <a:cs typeface="Open Sans"/>
+                <a:sym typeface="Open Sans"/>
+              </a:rPr>
+              <a:t>Institut </a:t>
+            </a:r>
+            <a:r>
+              <a:rPr lang="fr-FR" sz="1310" b="1" i="1" dirty="0" err="1">
+                <a:solidFill>
+                  <a:schemeClr val="dk2"/>
+                </a:solidFill>
+                <a:latin typeface="Open Sans"/>
+                <a:ea typeface="Open Sans"/>
+                <a:cs typeface="Open Sans"/>
+                <a:sym typeface="Open Sans"/>
+              </a:rPr>
+              <a:t>ExposUM</a:t>
+            </a:r>
+            <a:endParaRPr lang="fr-FR" sz="1310" b="1" i="1" dirty="0">
+              <a:solidFill>
+                <a:schemeClr val="dk2"/>
+              </a:solidFill>
+              <a:latin typeface="Open Sans"/>
+              <a:ea typeface="Open Sans"/>
+              <a:cs typeface="Open Sans"/>
+            </a:endParaRPr>
+          </a:p>
+          <a:p>
+            <a:pPr marL="450000">
+              <a:lnSpc>
+                <a:spcPct val="95000"/>
+              </a:lnSpc>
+              <a:buClr>
+                <a:schemeClr val="dk1"/>
+              </a:buClr>
+              <a:buSzPts val="1100"/>
+            </a:pPr>
+            <a:r>
+              <a:rPr lang="fr-FR" sz="1310" dirty="0" err="1">
+                <a:solidFill>
+                  <a:schemeClr val="dk2"/>
+                </a:solidFill>
+                <a:latin typeface="Open Sans"/>
+                <a:ea typeface="Open Sans"/>
+                <a:cs typeface="Open Sans"/>
+                <a:sym typeface="Open Sans"/>
+              </a:rPr>
+              <a:t>Mariline</a:t>
+            </a:r>
+            <a:r>
+              <a:rPr lang="fr-FR" sz="1310" dirty="0">
+                <a:solidFill>
+                  <a:schemeClr val="dk2"/>
+                </a:solidFill>
+                <a:latin typeface="Open Sans"/>
+                <a:ea typeface="Open Sans"/>
+                <a:cs typeface="Open Sans"/>
+                <a:sym typeface="Open Sans"/>
+              </a:rPr>
+              <a:t> </a:t>
+            </a:r>
+            <a:r>
+              <a:rPr lang="fr-FR" sz="1310" dirty="0" err="1">
+                <a:solidFill>
+                  <a:schemeClr val="dk2"/>
+                </a:solidFill>
+                <a:latin typeface="Open Sans"/>
+                <a:ea typeface="Open Sans"/>
+                <a:cs typeface="Open Sans"/>
+                <a:sym typeface="Open Sans"/>
+              </a:rPr>
+              <a:t>Poupaud</a:t>
+            </a:r>
+            <a:r>
+              <a:rPr lang="fr-FR" sz="1310" dirty="0">
+                <a:solidFill>
+                  <a:schemeClr val="dk2"/>
+                </a:solidFill>
+                <a:latin typeface="Open Sans"/>
+                <a:ea typeface="Open Sans"/>
+                <a:cs typeface="Open Sans"/>
+                <a:sym typeface="Open Sans"/>
+              </a:rPr>
+              <a:t> (UM)</a:t>
+            </a:r>
+            <a:endParaRPr lang="fr-FR" sz="1310" dirty="0">
+              <a:solidFill>
+                <a:schemeClr val="dk2"/>
+              </a:solidFill>
+              <a:latin typeface="Open Sans"/>
+              <a:ea typeface="Open Sans"/>
+              <a:cs typeface="Open Sans"/>
+            </a:endParaRPr>
+          </a:p>
+          <a:p>
+            <a:pPr marL="498475" marR="0" lvl="0" indent="-53975" algn="l" rtl="0">
+              <a:lnSpc>
+                <a:spcPct val="95000"/>
+              </a:lnSpc>
+              <a:spcBef>
+                <a:spcPts val="0"/>
+              </a:spcBef>
+              <a:spcAft>
+                <a:spcPts val="0"/>
+              </a:spcAft>
+              <a:buClr>
+                <a:schemeClr val="dk1"/>
+              </a:buClr>
+              <a:buSzPts val="1100"/>
+              <a:buFont typeface="Arial"/>
+              <a:buNone/>
+            </a:pPr>
+            <a:endParaRPr sz="1495" dirty="0"/>
+          </a:p>
+        </p:txBody>
+      </p:sp>
+      <p:sp>
+        <p:nvSpPr>
+          <p:cNvPr id="241" name="Google Shape;241;g387c7329e1e_1_0"/>
+          <p:cNvSpPr txBox="1"/>
+          <p:nvPr/>
+        </p:nvSpPr>
+        <p:spPr>
+          <a:xfrm>
+            <a:off x="5154556" y="260974"/>
+            <a:ext cx="6614400" cy="6304005"/>
+          </a:xfrm>
+          <a:prstGeom prst="rect">
+            <a:avLst/>
+          </a:prstGeom>
+          <a:noFill/>
+          <a:ln>
+            <a:noFill/>
+          </a:ln>
+        </p:spPr>
+        <p:txBody>
+          <a:bodyPr spcFirstLastPara="1" wrap="square" lIns="91425" tIns="45700" rIns="91425" bIns="45700" anchor="t" anchorCtr="0">
+            <a:noAutofit/>
+          </a:bodyPr>
+          <a:lstStyle/>
+          <a:p>
+            <a:pPr marL="0" marR="0" lvl="0" indent="0" algn="l" rtl="0">
+              <a:lnSpc>
+                <a:spcPct val="95000"/>
+              </a:lnSpc>
+              <a:spcBef>
+                <a:spcPts val="0"/>
+              </a:spcBef>
+              <a:spcAft>
+                <a:spcPts val="0"/>
+              </a:spcAft>
+              <a:buClr>
+                <a:schemeClr val="dk1"/>
+              </a:buClr>
+              <a:buSzPts val="1100"/>
+              <a:buFont typeface="Open Sans"/>
+              <a:buNone/>
+            </a:pPr>
+            <a:r>
+              <a:rPr lang="fr-FR" sz="1402" b="1" i="0" u="none" strike="noStrike" cap="none" dirty="0">
+                <a:solidFill>
+                  <a:schemeClr val="dk2"/>
+                </a:solidFill>
+                <a:latin typeface="Open Sans"/>
+                <a:ea typeface="Open Sans"/>
+                <a:cs typeface="Open Sans"/>
+                <a:sym typeface="Open Sans"/>
+              </a:rPr>
+              <a:t>Partenaires non-académiques</a:t>
+            </a:r>
+            <a:endParaRPr sz="1495" dirty="0"/>
+          </a:p>
+          <a:p>
+            <a:pPr marL="0" marR="0" lvl="0" indent="0" algn="l" rtl="0">
+              <a:lnSpc>
+                <a:spcPct val="95000"/>
+              </a:lnSpc>
+              <a:spcBef>
+                <a:spcPts val="0"/>
+              </a:spcBef>
+              <a:spcAft>
+                <a:spcPts val="0"/>
+              </a:spcAft>
+              <a:buClr>
+                <a:schemeClr val="dk1"/>
+              </a:buClr>
+              <a:buSzPts val="1100"/>
+              <a:buFont typeface="Avenir"/>
+              <a:buNone/>
+            </a:pPr>
+            <a:endParaRPr sz="1310" b="1" i="0" u="none" strike="noStrike" cap="none" dirty="0">
+              <a:solidFill>
+                <a:schemeClr val="dk2"/>
+              </a:solidFill>
+              <a:latin typeface="Open Sans"/>
+              <a:ea typeface="Open Sans"/>
+              <a:cs typeface="Open Sans"/>
+              <a:sym typeface="Open Sans"/>
+            </a:endParaRPr>
+          </a:p>
+          <a:p>
+            <a:pPr marL="0" marR="0" lvl="0" indent="0" algn="l" rtl="0">
+              <a:lnSpc>
+                <a:spcPct val="95000"/>
+              </a:lnSpc>
+              <a:spcBef>
+                <a:spcPts val="0"/>
+              </a:spcBef>
+              <a:spcAft>
+                <a:spcPts val="0"/>
+              </a:spcAft>
+              <a:buClr>
+                <a:schemeClr val="dk1"/>
+              </a:buClr>
+              <a:buSzPts val="1100"/>
+              <a:buFont typeface="Open Sans"/>
+              <a:buNone/>
+            </a:pPr>
+            <a:r>
+              <a:rPr lang="fr-FR" sz="1310" b="1" i="1" u="none" strike="noStrike" cap="none" dirty="0">
+                <a:solidFill>
+                  <a:schemeClr val="dk2"/>
+                </a:solidFill>
+                <a:latin typeface="Open Sans"/>
+                <a:ea typeface="Open Sans"/>
+                <a:cs typeface="Open Sans"/>
+                <a:sym typeface="Open Sans"/>
+              </a:rPr>
+              <a:t>Ville de Montpellier et Montpellier Méditerranée Métropole</a:t>
+            </a:r>
+            <a:endParaRPr sz="1495" dirty="0"/>
+          </a:p>
+          <a:p>
+            <a:pPr marL="0" marR="0" lvl="0" indent="0" algn="l" rtl="0">
+              <a:lnSpc>
+                <a:spcPct val="95000"/>
+              </a:lnSpc>
+              <a:spcBef>
+                <a:spcPts val="0"/>
+              </a:spcBef>
+              <a:spcAft>
+                <a:spcPts val="0"/>
+              </a:spcAft>
+              <a:buClr>
+                <a:schemeClr val="dk1"/>
+              </a:buClr>
+              <a:buSzPts val="1100"/>
+              <a:buFont typeface="Open Sans"/>
+              <a:buNone/>
+            </a:pPr>
+            <a:r>
+              <a:rPr lang="fr-FR" sz="1310" i="0" u="none" strike="noStrike" cap="none" dirty="0">
+                <a:solidFill>
+                  <a:schemeClr val="dk2"/>
+                </a:solidFill>
+                <a:latin typeface="Open Sans"/>
+                <a:ea typeface="Open Sans"/>
+                <a:cs typeface="Open Sans"/>
+                <a:sym typeface="Open Sans"/>
+              </a:rPr>
+              <a:t>	Yvon Perrin, Direction de la Santé Publique et Environnementale</a:t>
+            </a:r>
+            <a:endParaRPr sz="1495" dirty="0"/>
+          </a:p>
+          <a:p>
+            <a:pPr marL="0" marR="0" lvl="0" indent="0" algn="l" rtl="0">
+              <a:lnSpc>
+                <a:spcPct val="95000"/>
+              </a:lnSpc>
+              <a:spcBef>
+                <a:spcPts val="0"/>
+              </a:spcBef>
+              <a:spcAft>
+                <a:spcPts val="0"/>
+              </a:spcAft>
+              <a:buClr>
+                <a:schemeClr val="dk1"/>
+              </a:buClr>
+              <a:buSzPts val="1100"/>
+              <a:buFont typeface="Open Sans"/>
+              <a:buNone/>
+            </a:pPr>
+            <a:r>
+              <a:rPr lang="fr-FR" sz="1310" i="0" u="none" strike="noStrike" cap="none" dirty="0">
+                <a:solidFill>
+                  <a:schemeClr val="dk2"/>
+                </a:solidFill>
+                <a:latin typeface="Open Sans"/>
+                <a:ea typeface="Open Sans"/>
+                <a:cs typeface="Open Sans"/>
+                <a:sym typeface="Open Sans"/>
+              </a:rPr>
+              <a:t>	Stéphanie Grosset, Direction Nature, Agroécologie et Paysage</a:t>
+            </a:r>
+            <a:endParaRPr sz="1495" dirty="0"/>
+          </a:p>
+          <a:p>
+            <a:pPr marL="0" marR="0" lvl="0" indent="0" algn="l" rtl="0">
+              <a:lnSpc>
+                <a:spcPct val="95000"/>
+              </a:lnSpc>
+              <a:spcBef>
+                <a:spcPts val="0"/>
+              </a:spcBef>
+              <a:spcAft>
+                <a:spcPts val="0"/>
+              </a:spcAft>
+              <a:buClr>
+                <a:schemeClr val="dk1"/>
+              </a:buClr>
+              <a:buSzPts val="1100"/>
+              <a:buFont typeface="Open Sans"/>
+              <a:buNone/>
+            </a:pPr>
+            <a:r>
+              <a:rPr lang="fr-FR" sz="1310" i="0" u="none" strike="noStrike" cap="none" dirty="0">
+                <a:solidFill>
+                  <a:schemeClr val="dk2"/>
+                </a:solidFill>
+                <a:latin typeface="Open Sans"/>
+                <a:ea typeface="Open Sans"/>
+                <a:cs typeface="Open Sans"/>
+                <a:sym typeface="Open Sans"/>
+              </a:rPr>
+              <a:t>	Yann </a:t>
+            </a:r>
+            <a:r>
+              <a:rPr lang="fr-FR" sz="1310" i="0" u="none" strike="noStrike" cap="none" dirty="0" err="1">
+                <a:solidFill>
+                  <a:schemeClr val="dk2"/>
+                </a:solidFill>
+                <a:latin typeface="Open Sans"/>
+                <a:ea typeface="Open Sans"/>
+                <a:cs typeface="Open Sans"/>
+                <a:sym typeface="Open Sans"/>
+              </a:rPr>
+              <a:t>Raulet</a:t>
+            </a:r>
+            <a:r>
+              <a:rPr lang="fr-FR" sz="1310" i="0" u="none" strike="noStrike" cap="none" dirty="0">
+                <a:solidFill>
+                  <a:schemeClr val="dk2"/>
+                </a:solidFill>
+                <a:latin typeface="Open Sans"/>
+                <a:ea typeface="Open Sans"/>
+                <a:cs typeface="Open Sans"/>
+                <a:sym typeface="Open Sans"/>
+              </a:rPr>
+              <a:t>, Direction Nature, Agroécologie et Paysage</a:t>
+            </a:r>
+            <a:endParaRPr sz="1495" dirty="0"/>
+          </a:p>
+          <a:p>
+            <a:pPr marL="0" marR="0" lvl="0" indent="0" algn="l" rtl="0">
+              <a:lnSpc>
+                <a:spcPct val="95000"/>
+              </a:lnSpc>
+              <a:spcBef>
+                <a:spcPts val="0"/>
+              </a:spcBef>
+              <a:spcAft>
+                <a:spcPts val="0"/>
+              </a:spcAft>
+              <a:buClr>
+                <a:schemeClr val="dk1"/>
+              </a:buClr>
+              <a:buSzPts val="1100"/>
+              <a:buFont typeface="Open Sans"/>
+              <a:buNone/>
+            </a:pPr>
+            <a:r>
+              <a:rPr lang="fr-FR" sz="1310" i="0" u="none" strike="noStrike" cap="none" dirty="0">
+                <a:solidFill>
+                  <a:schemeClr val="dk2"/>
+                </a:solidFill>
+                <a:latin typeface="Open Sans"/>
+                <a:ea typeface="Open Sans"/>
+                <a:cs typeface="Open Sans"/>
+                <a:sym typeface="Open Sans"/>
+              </a:rPr>
+              <a:t>	David </a:t>
+            </a:r>
+            <a:r>
+              <a:rPr lang="fr-FR" sz="1310" i="0" u="none" strike="noStrike" cap="none" dirty="0" err="1">
+                <a:solidFill>
+                  <a:schemeClr val="dk2"/>
+                </a:solidFill>
+                <a:latin typeface="Open Sans"/>
+                <a:ea typeface="Open Sans"/>
+                <a:cs typeface="Open Sans"/>
+                <a:sym typeface="Open Sans"/>
+              </a:rPr>
+              <a:t>Gomis</a:t>
+            </a:r>
+            <a:r>
+              <a:rPr lang="fr-FR" sz="1310" i="0" u="none" strike="noStrike" cap="none" dirty="0">
+                <a:solidFill>
+                  <a:schemeClr val="dk2"/>
+                </a:solidFill>
+                <a:latin typeface="Open Sans"/>
+                <a:ea typeface="Open Sans"/>
+                <a:cs typeface="Open Sans"/>
+                <a:sym typeface="Open Sans"/>
+              </a:rPr>
+              <a:t>, Direction Nature, Agroécologie et Paysage</a:t>
+            </a:r>
+            <a:endParaRPr sz="1495" dirty="0"/>
+          </a:p>
+          <a:p>
+            <a:pPr marL="0" marR="0" lvl="0" indent="0" algn="l" rtl="0">
+              <a:lnSpc>
+                <a:spcPct val="95000"/>
+              </a:lnSpc>
+              <a:spcBef>
+                <a:spcPts val="0"/>
+              </a:spcBef>
+              <a:spcAft>
+                <a:spcPts val="0"/>
+              </a:spcAft>
+              <a:buClr>
+                <a:schemeClr val="dk1"/>
+              </a:buClr>
+              <a:buSzPts val="1100"/>
+              <a:buFont typeface="Open Sans"/>
+              <a:buNone/>
+            </a:pPr>
+            <a:r>
+              <a:rPr lang="fr-FR" sz="1310" i="0" u="none" strike="noStrike" cap="none" dirty="0">
+                <a:solidFill>
+                  <a:schemeClr val="dk2"/>
+                </a:solidFill>
+                <a:latin typeface="Open Sans"/>
+                <a:ea typeface="Open Sans"/>
+                <a:cs typeface="Open Sans"/>
+                <a:sym typeface="Open Sans"/>
+              </a:rPr>
+              <a:t>	Chloé Gauthier, GEMAPI</a:t>
+            </a:r>
+            <a:endParaRPr sz="1495" dirty="0"/>
+          </a:p>
+          <a:p>
+            <a:pPr marL="0" marR="0" lvl="0" indent="0" algn="l" rtl="0">
+              <a:lnSpc>
+                <a:spcPct val="95000"/>
+              </a:lnSpc>
+              <a:spcBef>
+                <a:spcPts val="0"/>
+              </a:spcBef>
+              <a:spcAft>
+                <a:spcPts val="0"/>
+              </a:spcAft>
+              <a:buClr>
+                <a:schemeClr val="dk1"/>
+              </a:buClr>
+              <a:buSzPts val="1100"/>
+              <a:buFont typeface="Open Sans"/>
+              <a:buNone/>
+            </a:pPr>
+            <a:r>
+              <a:rPr lang="fr-FR" sz="1310" i="0" u="none" strike="noStrike" cap="none" dirty="0">
+                <a:solidFill>
+                  <a:schemeClr val="dk2"/>
+                </a:solidFill>
+                <a:latin typeface="Open Sans"/>
+                <a:ea typeface="Open Sans"/>
+                <a:cs typeface="Open Sans"/>
+                <a:sym typeface="Open Sans"/>
+              </a:rPr>
+              <a:t>	Laurent Olivier, GEMAPI</a:t>
+            </a:r>
+            <a:endParaRPr sz="1495" dirty="0"/>
+          </a:p>
+          <a:p>
+            <a:pPr marL="0" marR="0" lvl="0" indent="0" algn="l" rtl="0">
+              <a:lnSpc>
+                <a:spcPct val="95000"/>
+              </a:lnSpc>
+              <a:spcBef>
+                <a:spcPts val="0"/>
+              </a:spcBef>
+              <a:spcAft>
+                <a:spcPts val="0"/>
+              </a:spcAft>
+              <a:buClr>
+                <a:schemeClr val="dk1"/>
+              </a:buClr>
+              <a:buSzPts val="1100"/>
+              <a:buFont typeface="Avenir"/>
+              <a:buNone/>
+            </a:pPr>
+            <a:endParaRPr sz="1310" b="1" i="0" u="none" strike="noStrike" cap="none" dirty="0">
+              <a:solidFill>
+                <a:schemeClr val="dk2"/>
+              </a:solidFill>
+              <a:latin typeface="Open Sans"/>
+              <a:ea typeface="Open Sans"/>
+              <a:cs typeface="Open Sans"/>
+              <a:sym typeface="Open Sans"/>
+            </a:endParaRPr>
+          </a:p>
+          <a:p>
+            <a:pPr marL="0" marR="0" lvl="0" indent="0" algn="l" rtl="0">
+              <a:lnSpc>
+                <a:spcPct val="95000"/>
+              </a:lnSpc>
+              <a:spcBef>
+                <a:spcPts val="0"/>
+              </a:spcBef>
+              <a:spcAft>
+                <a:spcPts val="0"/>
+              </a:spcAft>
+              <a:buClr>
+                <a:schemeClr val="dk1"/>
+              </a:buClr>
+              <a:buSzPts val="1100"/>
+              <a:buFont typeface="Open Sans"/>
+              <a:buNone/>
+            </a:pPr>
+            <a:r>
+              <a:rPr lang="fr-FR" sz="1310" b="1" i="1" u="none" strike="noStrike" cap="none" dirty="0">
+                <a:solidFill>
+                  <a:schemeClr val="dk2"/>
+                </a:solidFill>
+                <a:latin typeface="Open Sans"/>
+                <a:ea typeface="Open Sans"/>
+                <a:cs typeface="Open Sans"/>
+                <a:sym typeface="Open Sans"/>
+              </a:rPr>
+              <a:t>Ville de Lattes - Maison de la Nature</a:t>
+            </a:r>
+            <a:endParaRPr sz="1495" dirty="0"/>
+          </a:p>
+          <a:p>
+            <a:pPr marL="0" marR="0" lvl="0" indent="0" algn="l" rtl="0">
+              <a:lnSpc>
+                <a:spcPct val="95000"/>
+              </a:lnSpc>
+              <a:spcBef>
+                <a:spcPts val="0"/>
+              </a:spcBef>
+              <a:spcAft>
+                <a:spcPts val="0"/>
+              </a:spcAft>
+              <a:buClr>
+                <a:schemeClr val="dk1"/>
+              </a:buClr>
+              <a:buSzPts val="1100"/>
+              <a:buFont typeface="Open Sans"/>
+              <a:buNone/>
+            </a:pPr>
+            <a:r>
+              <a:rPr lang="fr-FR" sz="1310" b="1" i="0" u="none" strike="noStrike" cap="none" dirty="0">
+                <a:solidFill>
+                  <a:schemeClr val="dk2"/>
+                </a:solidFill>
+                <a:latin typeface="Open Sans"/>
+                <a:ea typeface="Open Sans"/>
+                <a:cs typeface="Open Sans"/>
+                <a:sym typeface="Open Sans"/>
+              </a:rPr>
+              <a:t>	</a:t>
+            </a:r>
+            <a:r>
+              <a:rPr lang="fr-FR" sz="1310" i="0" u="none" strike="noStrike" cap="none" dirty="0">
+                <a:solidFill>
+                  <a:schemeClr val="dk2"/>
+                </a:solidFill>
+                <a:latin typeface="Open Sans"/>
+                <a:ea typeface="Open Sans"/>
+                <a:cs typeface="Open Sans"/>
+                <a:sym typeface="Open Sans"/>
+              </a:rPr>
+              <a:t>Gwenaëlle Faucon</a:t>
+            </a:r>
+            <a:endParaRPr sz="1495" dirty="0"/>
+          </a:p>
+          <a:p>
+            <a:pPr marL="0" marR="0" lvl="0" indent="0" algn="l" rtl="0">
+              <a:lnSpc>
+                <a:spcPct val="95000"/>
+              </a:lnSpc>
+              <a:spcBef>
+                <a:spcPts val="0"/>
+              </a:spcBef>
+              <a:spcAft>
+                <a:spcPts val="0"/>
+              </a:spcAft>
+              <a:buClr>
+                <a:schemeClr val="dk1"/>
+              </a:buClr>
+              <a:buSzPts val="1100"/>
+              <a:buFont typeface="Open Sans"/>
+              <a:buNone/>
+            </a:pPr>
+            <a:r>
+              <a:rPr lang="fr-FR" sz="1310" i="0" u="none" strike="noStrike" cap="none" dirty="0">
+                <a:solidFill>
+                  <a:schemeClr val="dk2"/>
+                </a:solidFill>
+                <a:latin typeface="Open Sans"/>
+                <a:ea typeface="Open Sans"/>
+                <a:cs typeface="Open Sans"/>
+                <a:sym typeface="Open Sans"/>
+              </a:rPr>
+              <a:t>	Nathalie Tajan</a:t>
+            </a:r>
+            <a:endParaRPr sz="1495" dirty="0"/>
+          </a:p>
+          <a:p>
+            <a:pPr marL="0" marR="0" lvl="0" indent="0" algn="l" rtl="0">
+              <a:lnSpc>
+                <a:spcPct val="95000"/>
+              </a:lnSpc>
+              <a:spcBef>
+                <a:spcPts val="0"/>
+              </a:spcBef>
+              <a:spcAft>
+                <a:spcPts val="0"/>
+              </a:spcAft>
+              <a:buClr>
+                <a:schemeClr val="dk1"/>
+              </a:buClr>
+              <a:buSzPts val="1100"/>
+              <a:buFont typeface="Open Sans"/>
+              <a:buNone/>
+            </a:pPr>
+            <a:r>
+              <a:rPr lang="fr-FR" sz="1310" i="0" u="none" strike="noStrike" cap="none" dirty="0">
+                <a:solidFill>
+                  <a:schemeClr val="dk2"/>
+                </a:solidFill>
+                <a:latin typeface="Open Sans"/>
+                <a:ea typeface="Open Sans"/>
+                <a:cs typeface="Open Sans"/>
+                <a:sym typeface="Open Sans"/>
+              </a:rPr>
+              <a:t>	Max </a:t>
+            </a:r>
+            <a:r>
+              <a:rPr lang="fr-FR" sz="1310" i="0" u="none" strike="noStrike" cap="none" dirty="0" err="1">
+                <a:solidFill>
+                  <a:schemeClr val="dk2"/>
+                </a:solidFill>
+                <a:latin typeface="Open Sans"/>
+                <a:ea typeface="Open Sans"/>
+                <a:cs typeface="Open Sans"/>
+                <a:sym typeface="Open Sans"/>
+              </a:rPr>
+              <a:t>Lecouturier</a:t>
+            </a:r>
+            <a:endParaRPr sz="1310" i="0" u="none" strike="noStrike" cap="none" dirty="0">
+              <a:solidFill>
+                <a:schemeClr val="dk2"/>
+              </a:solidFill>
+              <a:latin typeface="Open Sans"/>
+              <a:ea typeface="Open Sans"/>
+              <a:cs typeface="Open Sans"/>
+              <a:sym typeface="Open Sans"/>
+            </a:endParaRPr>
+          </a:p>
+          <a:p>
+            <a:pPr marL="0" marR="0" lvl="0" indent="0" algn="l" rtl="0">
+              <a:lnSpc>
+                <a:spcPct val="95000"/>
+              </a:lnSpc>
+              <a:spcBef>
+                <a:spcPts val="0"/>
+              </a:spcBef>
+              <a:spcAft>
+                <a:spcPts val="0"/>
+              </a:spcAft>
+              <a:buClr>
+                <a:schemeClr val="dk1"/>
+              </a:buClr>
+              <a:buSzPts val="1100"/>
+              <a:buFont typeface="Avenir"/>
+              <a:buNone/>
+            </a:pPr>
+            <a:endParaRPr sz="1310" b="1" i="0" u="none" strike="noStrike" cap="none" dirty="0">
+              <a:solidFill>
+                <a:schemeClr val="dk2"/>
+              </a:solidFill>
+              <a:latin typeface="Open Sans"/>
+              <a:ea typeface="Open Sans"/>
+              <a:cs typeface="Open Sans"/>
+              <a:sym typeface="Open Sans"/>
+            </a:endParaRPr>
+          </a:p>
+          <a:p>
+            <a:pPr marL="0" marR="0" lvl="0" indent="0" algn="l" rtl="0">
+              <a:lnSpc>
+                <a:spcPct val="95000"/>
+              </a:lnSpc>
+              <a:spcBef>
+                <a:spcPts val="0"/>
+              </a:spcBef>
+              <a:spcAft>
+                <a:spcPts val="0"/>
+              </a:spcAft>
+              <a:buClr>
+                <a:schemeClr val="dk1"/>
+              </a:buClr>
+              <a:buSzPts val="1100"/>
+              <a:buFont typeface="Open Sans"/>
+              <a:buNone/>
+            </a:pPr>
+            <a:r>
+              <a:rPr lang="fr-FR" sz="1310" b="1" i="1" u="none" strike="noStrike" cap="none" dirty="0">
+                <a:solidFill>
+                  <a:schemeClr val="dk2"/>
+                </a:solidFill>
+                <a:latin typeface="Open Sans"/>
+                <a:ea typeface="Open Sans"/>
+                <a:cs typeface="Open Sans"/>
+                <a:sym typeface="Open Sans"/>
+              </a:rPr>
+              <a:t>EPTB du Lez</a:t>
+            </a:r>
+            <a:endParaRPr sz="1495" dirty="0"/>
+          </a:p>
+          <a:p>
+            <a:pPr marL="0" marR="0" lvl="0" indent="0" algn="l" rtl="0">
+              <a:lnSpc>
+                <a:spcPct val="95000"/>
+              </a:lnSpc>
+              <a:spcBef>
+                <a:spcPts val="0"/>
+              </a:spcBef>
+              <a:spcAft>
+                <a:spcPts val="0"/>
+              </a:spcAft>
+              <a:buClr>
+                <a:schemeClr val="dk1"/>
+              </a:buClr>
+              <a:buSzPts val="1100"/>
+              <a:buFont typeface="Open Sans"/>
+              <a:buNone/>
+            </a:pPr>
+            <a:r>
+              <a:rPr lang="fr-FR" sz="1310" b="1" i="0" u="none" strike="noStrike" cap="none" dirty="0">
+                <a:solidFill>
+                  <a:schemeClr val="dk2"/>
+                </a:solidFill>
+                <a:latin typeface="Open Sans"/>
+                <a:ea typeface="Open Sans"/>
+                <a:cs typeface="Open Sans"/>
+                <a:sym typeface="Open Sans"/>
+              </a:rPr>
+              <a:t>	</a:t>
+            </a:r>
+            <a:r>
+              <a:rPr lang="fr-FR" sz="1310" i="0" u="none" strike="noStrike" cap="none" dirty="0">
+                <a:solidFill>
+                  <a:schemeClr val="dk2"/>
+                </a:solidFill>
+                <a:latin typeface="Open Sans"/>
+                <a:ea typeface="Open Sans"/>
+                <a:cs typeface="Open Sans"/>
+                <a:sym typeface="Open Sans"/>
+              </a:rPr>
+              <a:t>Vincent </a:t>
+            </a:r>
+            <a:r>
+              <a:rPr lang="fr-FR" sz="1310" i="0" u="none" strike="noStrike" cap="none" dirty="0" err="1">
+                <a:solidFill>
+                  <a:schemeClr val="dk2"/>
+                </a:solidFill>
+                <a:latin typeface="Open Sans"/>
+                <a:ea typeface="Open Sans"/>
+                <a:cs typeface="Open Sans"/>
+                <a:sym typeface="Open Sans"/>
+              </a:rPr>
+              <a:t>Sablain</a:t>
+            </a:r>
+            <a:endParaRPr sz="1310" i="0" u="none" strike="noStrike" cap="none" dirty="0">
+              <a:solidFill>
+                <a:schemeClr val="dk2"/>
+              </a:solidFill>
+              <a:latin typeface="Open Sans"/>
+              <a:ea typeface="Open Sans"/>
+              <a:cs typeface="Open Sans"/>
+              <a:sym typeface="Open Sans"/>
+            </a:endParaRPr>
+          </a:p>
+          <a:p>
+            <a:pPr marL="0" marR="0" lvl="0" indent="0" algn="l" rtl="0">
+              <a:lnSpc>
+                <a:spcPct val="95000"/>
+              </a:lnSpc>
+              <a:spcBef>
+                <a:spcPts val="0"/>
+              </a:spcBef>
+              <a:spcAft>
+                <a:spcPts val="0"/>
+              </a:spcAft>
+              <a:buClr>
+                <a:schemeClr val="dk1"/>
+              </a:buClr>
+              <a:buSzPts val="1100"/>
+              <a:buFont typeface="Avenir"/>
+              <a:buNone/>
+            </a:pPr>
+            <a:endParaRPr sz="1310" b="1" i="0" u="none" strike="noStrike" cap="none" dirty="0">
+              <a:solidFill>
+                <a:schemeClr val="dk2"/>
+              </a:solidFill>
+              <a:latin typeface="Open Sans"/>
+              <a:ea typeface="Open Sans"/>
+              <a:cs typeface="Open Sans"/>
+              <a:sym typeface="Open Sans"/>
+            </a:endParaRPr>
+          </a:p>
+          <a:p>
+            <a:pPr marL="0" marR="0" lvl="0" indent="0" algn="l" rtl="0">
+              <a:lnSpc>
+                <a:spcPct val="95000"/>
+              </a:lnSpc>
+              <a:spcBef>
+                <a:spcPts val="0"/>
+              </a:spcBef>
+              <a:spcAft>
+                <a:spcPts val="0"/>
+              </a:spcAft>
+              <a:buClr>
+                <a:schemeClr val="dk1"/>
+              </a:buClr>
+              <a:buSzPts val="1100"/>
+              <a:buFont typeface="Open Sans"/>
+              <a:buNone/>
+            </a:pPr>
+            <a:r>
+              <a:rPr lang="fr-FR" sz="1310" b="1" i="1" u="none" strike="noStrike" cap="none" dirty="0">
+                <a:solidFill>
+                  <a:schemeClr val="dk2"/>
+                </a:solidFill>
+                <a:latin typeface="Open Sans"/>
+                <a:ea typeface="Open Sans"/>
+                <a:cs typeface="Open Sans"/>
+                <a:sym typeface="Open Sans"/>
+              </a:rPr>
+              <a:t>EPTB de l'Or</a:t>
+            </a:r>
+            <a:endParaRPr sz="1495" dirty="0"/>
+          </a:p>
+          <a:p>
+            <a:pPr marL="0" marR="0" lvl="0" indent="0" algn="l" rtl="0">
+              <a:lnSpc>
+                <a:spcPct val="95000"/>
+              </a:lnSpc>
+              <a:spcBef>
+                <a:spcPts val="0"/>
+              </a:spcBef>
+              <a:spcAft>
+                <a:spcPts val="0"/>
+              </a:spcAft>
+              <a:buClr>
+                <a:schemeClr val="dk1"/>
+              </a:buClr>
+              <a:buSzPts val="1100"/>
+              <a:buFont typeface="Open Sans"/>
+              <a:buNone/>
+            </a:pPr>
+            <a:r>
+              <a:rPr lang="fr-FR" sz="1310" b="1" i="0" u="none" strike="noStrike" cap="none" dirty="0">
+                <a:solidFill>
+                  <a:schemeClr val="dk2"/>
+                </a:solidFill>
+                <a:latin typeface="Open Sans"/>
+                <a:ea typeface="Open Sans"/>
+                <a:cs typeface="Open Sans"/>
+                <a:sym typeface="Open Sans"/>
+              </a:rPr>
+              <a:t>	</a:t>
+            </a:r>
+            <a:r>
+              <a:rPr lang="fr-FR" sz="1310" i="0" u="none" strike="noStrike" cap="none" dirty="0">
+                <a:solidFill>
+                  <a:schemeClr val="dk2"/>
+                </a:solidFill>
+                <a:latin typeface="Open Sans"/>
+                <a:ea typeface="Open Sans"/>
+                <a:cs typeface="Open Sans"/>
+                <a:sym typeface="Open Sans"/>
+              </a:rPr>
+              <a:t>Sarah Pontet </a:t>
+            </a:r>
+            <a:endParaRPr sz="1495" dirty="0"/>
+          </a:p>
+          <a:p>
+            <a:pPr marL="0" marR="0" lvl="0" indent="457200" algn="l" rtl="0">
+              <a:lnSpc>
+                <a:spcPct val="95000"/>
+              </a:lnSpc>
+              <a:spcBef>
+                <a:spcPts val="0"/>
+              </a:spcBef>
+              <a:spcAft>
+                <a:spcPts val="0"/>
+              </a:spcAft>
+              <a:buClr>
+                <a:schemeClr val="dk1"/>
+              </a:buClr>
+              <a:buSzPts val="1100"/>
+              <a:buFont typeface="Open Sans"/>
+              <a:buNone/>
+            </a:pPr>
+            <a:r>
+              <a:rPr lang="fr-FR" sz="1310" i="0" u="none" strike="noStrike" cap="none" dirty="0">
+                <a:solidFill>
+                  <a:schemeClr val="dk2"/>
+                </a:solidFill>
+                <a:latin typeface="Open Sans"/>
+                <a:ea typeface="Open Sans"/>
+                <a:cs typeface="Open Sans"/>
+                <a:sym typeface="Open Sans"/>
+              </a:rPr>
+              <a:t>	Nathalie </a:t>
+            </a:r>
+            <a:r>
+              <a:rPr lang="fr-FR" sz="1310" i="0" u="none" strike="noStrike" cap="none" dirty="0" err="1">
+                <a:solidFill>
+                  <a:schemeClr val="dk2"/>
+                </a:solidFill>
+                <a:latin typeface="Open Sans"/>
+                <a:ea typeface="Open Sans"/>
+                <a:cs typeface="Open Sans"/>
+                <a:sym typeface="Open Sans"/>
+              </a:rPr>
+              <a:t>Vazzoler</a:t>
+            </a:r>
+            <a:endParaRPr sz="1310" i="0" u="none" strike="noStrike" cap="none" dirty="0">
+              <a:solidFill>
+                <a:schemeClr val="dk2"/>
+              </a:solidFill>
+              <a:latin typeface="Open Sans"/>
+              <a:ea typeface="Open Sans"/>
+              <a:cs typeface="Open Sans"/>
+              <a:sym typeface="Open Sans"/>
+            </a:endParaRPr>
+          </a:p>
+          <a:p>
+            <a:pPr marL="0" marR="0" lvl="0" indent="0" algn="l" rtl="0">
+              <a:lnSpc>
+                <a:spcPct val="95000"/>
+              </a:lnSpc>
+              <a:spcBef>
+                <a:spcPts val="0"/>
+              </a:spcBef>
+              <a:spcAft>
+                <a:spcPts val="0"/>
+              </a:spcAft>
+              <a:buClr>
+                <a:schemeClr val="dk1"/>
+              </a:buClr>
+              <a:buSzPts val="1100"/>
+              <a:buFont typeface="Avenir"/>
+              <a:buNone/>
+            </a:pPr>
+            <a:endParaRPr sz="1310" b="1" i="0" u="none" strike="noStrike" cap="none" dirty="0">
+              <a:solidFill>
+                <a:schemeClr val="dk2"/>
+              </a:solidFill>
+              <a:latin typeface="Open Sans"/>
+              <a:ea typeface="Open Sans"/>
+              <a:cs typeface="Open Sans"/>
+              <a:sym typeface="Open Sans"/>
+            </a:endParaRPr>
+          </a:p>
+          <a:p>
+            <a:pPr marL="0" marR="0" lvl="0" indent="0" algn="l" rtl="0">
+              <a:lnSpc>
+                <a:spcPct val="95000"/>
+              </a:lnSpc>
+              <a:spcBef>
+                <a:spcPts val="0"/>
+              </a:spcBef>
+              <a:spcAft>
+                <a:spcPts val="0"/>
+              </a:spcAft>
+              <a:buClr>
+                <a:schemeClr val="dk1"/>
+              </a:buClr>
+              <a:buSzPts val="1100"/>
+              <a:buFont typeface="Open Sans"/>
+              <a:buNone/>
+            </a:pPr>
+            <a:r>
+              <a:rPr lang="fr-FR" sz="1310" b="1" i="1" u="none" strike="noStrike" cap="none" dirty="0">
+                <a:solidFill>
+                  <a:schemeClr val="dk2"/>
+                </a:solidFill>
+                <a:latin typeface="Open Sans"/>
+                <a:ea typeface="Open Sans"/>
+                <a:cs typeface="Open Sans"/>
+                <a:sym typeface="Open Sans"/>
+              </a:rPr>
+              <a:t>CEN Occitanie - Espèces Exotiques Envahissantes</a:t>
+            </a:r>
+            <a:endParaRPr sz="1495" dirty="0"/>
+          </a:p>
+          <a:p>
+            <a:pPr marL="0" marR="0" lvl="0" indent="0" algn="l" rtl="0">
+              <a:lnSpc>
+                <a:spcPct val="95000"/>
+              </a:lnSpc>
+              <a:spcBef>
+                <a:spcPts val="0"/>
+              </a:spcBef>
+              <a:spcAft>
+                <a:spcPts val="0"/>
+              </a:spcAft>
+              <a:buClr>
+                <a:schemeClr val="dk1"/>
+              </a:buClr>
+              <a:buSzPts val="1100"/>
+              <a:buFont typeface="Open Sans"/>
+              <a:buNone/>
+            </a:pPr>
+            <a:r>
+              <a:rPr lang="fr-FR" sz="1310" b="1" i="0" u="none" strike="noStrike" cap="none" dirty="0">
+                <a:solidFill>
+                  <a:schemeClr val="dk2"/>
+                </a:solidFill>
+                <a:latin typeface="Open Sans"/>
+                <a:ea typeface="Open Sans"/>
+                <a:cs typeface="Open Sans"/>
+                <a:sym typeface="Open Sans"/>
+              </a:rPr>
+              <a:t>	</a:t>
+            </a:r>
+            <a:r>
+              <a:rPr lang="fr-FR" sz="1310" i="0" u="none" strike="noStrike" cap="none" dirty="0">
+                <a:solidFill>
+                  <a:schemeClr val="dk2"/>
+                </a:solidFill>
+                <a:latin typeface="Open Sans"/>
+                <a:ea typeface="Open Sans"/>
+                <a:cs typeface="Open Sans"/>
+                <a:sym typeface="Open Sans"/>
+              </a:rPr>
+              <a:t>Iris Lang</a:t>
+            </a:r>
+            <a:endParaRPr sz="1495" dirty="0"/>
+          </a:p>
+          <a:p>
+            <a:pPr marL="0" marR="0" lvl="0" indent="0" algn="l" rtl="0">
+              <a:lnSpc>
+                <a:spcPct val="95000"/>
+              </a:lnSpc>
+              <a:spcBef>
+                <a:spcPts val="0"/>
+              </a:spcBef>
+              <a:spcAft>
+                <a:spcPts val="0"/>
+              </a:spcAft>
+              <a:buClr>
+                <a:schemeClr val="dk1"/>
+              </a:buClr>
+              <a:buSzPts val="1100"/>
+              <a:buFont typeface="Open Sans"/>
+              <a:buNone/>
+            </a:pPr>
+            <a:r>
+              <a:rPr lang="fr-FR" sz="1310" i="0" u="none" strike="noStrike" cap="none" dirty="0">
+                <a:solidFill>
+                  <a:schemeClr val="dk2"/>
+                </a:solidFill>
+                <a:latin typeface="Open Sans"/>
+                <a:ea typeface="Open Sans"/>
+                <a:cs typeface="Open Sans"/>
+                <a:sym typeface="Open Sans"/>
+              </a:rPr>
+              <a:t>	Justine Nicolas</a:t>
+            </a:r>
+            <a:endParaRPr sz="1495" dirty="0"/>
+          </a:p>
+          <a:p>
+            <a:pPr marL="0" marR="0" lvl="0" indent="0" algn="l" rtl="0">
+              <a:lnSpc>
+                <a:spcPct val="95000"/>
+              </a:lnSpc>
+              <a:spcBef>
+                <a:spcPts val="0"/>
+              </a:spcBef>
+              <a:spcAft>
+                <a:spcPts val="0"/>
+              </a:spcAft>
+              <a:buClr>
+                <a:schemeClr val="dk1"/>
+              </a:buClr>
+              <a:buSzPts val="1100"/>
+              <a:buFont typeface="Avenir"/>
+              <a:buNone/>
+            </a:pPr>
+            <a:endParaRPr sz="1310" b="1" i="0" u="none" strike="noStrike" cap="none" dirty="0">
+              <a:solidFill>
+                <a:schemeClr val="dk2"/>
+              </a:solidFill>
+              <a:latin typeface="Open Sans"/>
+              <a:ea typeface="Open Sans"/>
+              <a:cs typeface="Open Sans"/>
+              <a:sym typeface="Open Sans"/>
+            </a:endParaRPr>
+          </a:p>
+          <a:p>
+            <a:pPr marL="0" marR="0" lvl="0" indent="0" algn="l" rtl="0">
+              <a:lnSpc>
+                <a:spcPct val="95000"/>
+              </a:lnSpc>
+              <a:spcBef>
+                <a:spcPts val="0"/>
+              </a:spcBef>
+              <a:spcAft>
+                <a:spcPts val="0"/>
+              </a:spcAft>
+              <a:buClr>
+                <a:schemeClr val="dk1"/>
+              </a:buClr>
+              <a:buSzPts val="1100"/>
+              <a:buFont typeface="Open Sans"/>
+              <a:buNone/>
+            </a:pPr>
+            <a:r>
+              <a:rPr lang="fr-FR" sz="1310" b="1" i="1" u="none" strike="noStrike" cap="none" dirty="0">
+                <a:solidFill>
+                  <a:schemeClr val="dk2"/>
+                </a:solidFill>
+                <a:latin typeface="Open Sans"/>
+                <a:ea typeface="Open Sans"/>
+                <a:cs typeface="Open Sans"/>
+                <a:sym typeface="Open Sans"/>
+              </a:rPr>
+              <a:t>FDC Hérault</a:t>
+            </a:r>
+            <a:endParaRPr sz="1495" dirty="0"/>
+          </a:p>
+          <a:p>
+            <a:pPr marL="0" marR="0" lvl="0" indent="0" algn="l" rtl="0">
+              <a:lnSpc>
+                <a:spcPct val="95000"/>
+              </a:lnSpc>
+              <a:spcBef>
+                <a:spcPts val="0"/>
+              </a:spcBef>
+              <a:spcAft>
+                <a:spcPts val="0"/>
+              </a:spcAft>
+              <a:buClr>
+                <a:schemeClr val="dk1"/>
+              </a:buClr>
+              <a:buSzPts val="1100"/>
+              <a:buFont typeface="Open Sans"/>
+              <a:buNone/>
+            </a:pPr>
+            <a:r>
+              <a:rPr lang="fr-FR" sz="1310" b="1" i="0" u="none" strike="noStrike" cap="none" dirty="0">
+                <a:solidFill>
+                  <a:schemeClr val="dk2"/>
+                </a:solidFill>
+                <a:latin typeface="Open Sans"/>
+                <a:ea typeface="Open Sans"/>
+                <a:cs typeface="Open Sans"/>
+                <a:sym typeface="Open Sans"/>
+              </a:rPr>
+              <a:t>	</a:t>
+            </a:r>
+            <a:r>
+              <a:rPr lang="fr-FR" sz="1310" i="0" u="none" strike="noStrike" cap="none" dirty="0">
+                <a:solidFill>
+                  <a:schemeClr val="dk2"/>
+                </a:solidFill>
+                <a:latin typeface="Open Sans"/>
+                <a:ea typeface="Open Sans"/>
+                <a:cs typeface="Open Sans"/>
+                <a:sym typeface="Open Sans"/>
+              </a:rPr>
+              <a:t>Tanguy Lebrun</a:t>
+            </a:r>
+            <a:endParaRPr sz="1495" dirty="0"/>
+          </a:p>
+          <a:p>
+            <a:pPr marL="0" marR="0" lvl="0" indent="0" algn="l" rtl="0">
+              <a:lnSpc>
+                <a:spcPct val="95000"/>
+              </a:lnSpc>
+              <a:spcBef>
+                <a:spcPts val="0"/>
+              </a:spcBef>
+              <a:spcAft>
+                <a:spcPts val="0"/>
+              </a:spcAft>
+              <a:buClr>
+                <a:schemeClr val="dk1"/>
+              </a:buClr>
+              <a:buSzPts val="1100"/>
+              <a:buFont typeface="Avenir"/>
+              <a:buNone/>
+            </a:pPr>
+            <a:endParaRPr sz="1310" b="1" i="0" u="none" strike="noStrike" cap="none" dirty="0">
+              <a:solidFill>
+                <a:schemeClr val="dk2"/>
+              </a:solidFill>
+              <a:latin typeface="Open Sans"/>
+              <a:ea typeface="Open Sans"/>
+              <a:cs typeface="Open Sans"/>
+              <a:sym typeface="Open Sans"/>
+            </a:endParaRPr>
+          </a:p>
+          <a:p>
+            <a:pPr marL="0" marR="0" lvl="0" indent="0" algn="l" rtl="0">
+              <a:lnSpc>
+                <a:spcPct val="95000"/>
+              </a:lnSpc>
+              <a:spcBef>
+                <a:spcPts val="0"/>
+              </a:spcBef>
+              <a:spcAft>
+                <a:spcPts val="0"/>
+              </a:spcAft>
+              <a:buClr>
+                <a:schemeClr val="dk1"/>
+              </a:buClr>
+              <a:buSzPts val="1100"/>
+              <a:buFont typeface="Open Sans"/>
+              <a:buNone/>
+            </a:pPr>
+            <a:r>
+              <a:rPr lang="fr-FR" sz="1310" b="1" i="1" u="none" strike="noStrike" cap="none" dirty="0">
+                <a:solidFill>
+                  <a:schemeClr val="dk2"/>
+                </a:solidFill>
+                <a:latin typeface="Open Sans"/>
+                <a:ea typeface="Open Sans"/>
+                <a:cs typeface="Open Sans"/>
+                <a:sym typeface="Open Sans"/>
+              </a:rPr>
+              <a:t>Société de chasse Prades-le-Lez</a:t>
+            </a:r>
+            <a:endParaRPr sz="1495" dirty="0"/>
+          </a:p>
+          <a:p>
+            <a:pPr marL="0" marR="0" lvl="0" indent="0" algn="l" rtl="0">
+              <a:lnSpc>
+                <a:spcPct val="95000"/>
+              </a:lnSpc>
+              <a:spcBef>
+                <a:spcPts val="0"/>
+              </a:spcBef>
+              <a:spcAft>
+                <a:spcPts val="0"/>
+              </a:spcAft>
+              <a:buClr>
+                <a:schemeClr val="dk1"/>
+              </a:buClr>
+              <a:buSzPts val="1100"/>
+              <a:buFont typeface="Open Sans"/>
+              <a:buNone/>
+            </a:pPr>
+            <a:r>
+              <a:rPr lang="fr-FR" sz="1310" b="1" i="0" u="none" strike="noStrike" cap="none" dirty="0">
+                <a:solidFill>
+                  <a:schemeClr val="dk2"/>
+                </a:solidFill>
+                <a:latin typeface="Open Sans"/>
+                <a:ea typeface="Open Sans"/>
+                <a:cs typeface="Open Sans"/>
+                <a:sym typeface="Open Sans"/>
+              </a:rPr>
+              <a:t>	</a:t>
+            </a:r>
+            <a:r>
+              <a:rPr lang="fr-FR" sz="1310" i="0" u="none" strike="noStrike" cap="none" dirty="0">
+                <a:solidFill>
+                  <a:schemeClr val="dk2"/>
+                </a:solidFill>
+                <a:latin typeface="Open Sans"/>
+                <a:ea typeface="Open Sans"/>
+                <a:cs typeface="Open Sans"/>
+                <a:sym typeface="Open Sans"/>
+              </a:rPr>
+              <a:t>Jean-Louis </a:t>
+            </a:r>
+            <a:r>
+              <a:rPr lang="fr-FR" sz="1310" i="0" u="none" strike="noStrike" cap="none" dirty="0" err="1">
+                <a:solidFill>
+                  <a:schemeClr val="dk2"/>
+                </a:solidFill>
+                <a:latin typeface="Open Sans"/>
+                <a:ea typeface="Open Sans"/>
+                <a:cs typeface="Open Sans"/>
+                <a:sym typeface="Open Sans"/>
+              </a:rPr>
+              <a:t>Capano</a:t>
+            </a:r>
+            <a:endParaRPr sz="1310" i="0" u="none" strike="noStrike" cap="none" dirty="0">
+              <a:solidFill>
+                <a:schemeClr val="dk2"/>
+              </a:solidFill>
+              <a:latin typeface="Open Sans"/>
+              <a:ea typeface="Open Sans"/>
+              <a:cs typeface="Open Sans"/>
+              <a:sym typeface="Open Sans"/>
+            </a:endParaRPr>
+          </a:p>
+          <a:p>
+            <a:pPr marL="0" marR="0" lvl="0" indent="0" algn="l" rtl="0">
+              <a:lnSpc>
+                <a:spcPct val="95000"/>
+              </a:lnSpc>
+              <a:spcBef>
+                <a:spcPts val="0"/>
+              </a:spcBef>
+              <a:spcAft>
+                <a:spcPts val="0"/>
+              </a:spcAft>
+              <a:buClr>
+                <a:schemeClr val="dk1"/>
+              </a:buClr>
+              <a:buSzPts val="1100"/>
+              <a:buFont typeface="Open Sans"/>
+              <a:buNone/>
+            </a:pPr>
+            <a:r>
+              <a:rPr lang="fr-FR" sz="1310" i="0" u="none" strike="noStrike" cap="none" dirty="0">
+                <a:solidFill>
+                  <a:schemeClr val="dk2"/>
+                </a:solidFill>
+                <a:latin typeface="Open Sans"/>
+                <a:ea typeface="Open Sans"/>
+                <a:cs typeface="Open Sans"/>
+                <a:sym typeface="Open Sans"/>
+              </a:rPr>
+              <a:t>	</a:t>
+            </a:r>
+            <a:r>
+              <a:rPr lang="fr-FR" sz="1310" i="0" u="none" strike="noStrike" cap="none" dirty="0" err="1">
+                <a:solidFill>
+                  <a:schemeClr val="dk2"/>
+                </a:solidFill>
+                <a:latin typeface="Open Sans"/>
+                <a:ea typeface="Open Sans"/>
+                <a:cs typeface="Open Sans"/>
+                <a:sym typeface="Open Sans"/>
+              </a:rPr>
+              <a:t>Eric</a:t>
+            </a:r>
+            <a:r>
+              <a:rPr lang="fr-FR" sz="1310" i="0" u="none" strike="noStrike" cap="none" dirty="0">
+                <a:solidFill>
+                  <a:schemeClr val="dk2"/>
+                </a:solidFill>
+                <a:latin typeface="Open Sans"/>
+                <a:ea typeface="Open Sans"/>
+                <a:cs typeface="Open Sans"/>
+                <a:sym typeface="Open Sans"/>
+              </a:rPr>
+              <a:t> Deneuve</a:t>
+            </a:r>
+            <a:endParaRPr sz="1495" dirty="0"/>
+          </a:p>
+          <a:p>
+            <a:pPr marL="450000" marR="0" lvl="0" indent="0" algn="l" rtl="0">
+              <a:lnSpc>
+                <a:spcPct val="95000"/>
+              </a:lnSpc>
+              <a:spcBef>
+                <a:spcPts val="0"/>
+              </a:spcBef>
+              <a:spcAft>
+                <a:spcPts val="0"/>
+              </a:spcAft>
+              <a:buClr>
+                <a:schemeClr val="dk1"/>
+              </a:buClr>
+              <a:buSzPts val="1100"/>
+              <a:buFont typeface="Avenir"/>
+              <a:buNone/>
+            </a:pPr>
+            <a:endParaRPr sz="1310" b="1" i="0" u="none" strike="noStrike" cap="none" dirty="0">
+              <a:solidFill>
+                <a:schemeClr val="dk2"/>
+              </a:solidFill>
+              <a:latin typeface="Open Sans"/>
+              <a:ea typeface="Open Sans"/>
+              <a:cs typeface="Open Sans"/>
+              <a:sym typeface="Open Sans"/>
+            </a:endParaRPr>
+          </a:p>
+        </p:txBody>
+      </p:sp>
+    </p:spTree>
+  </p:cSld>
+  <p:clrMapOvr>
+    <a:masterClrMapping/>
+  </p:clrMapOvr>
+</p:sld>
+</file>
+
+<file path=ppt/slides/slide2.xml><?xml version="1.0" encoding="utf-8"?>
+<p:sld xmlns:a="http://schemas.openxmlformats.org/drawingml/2006/main" xmlns:r="http://schemas.openxmlformats.org/officeDocument/2006/relationships" xmlns:p="http://schemas.openxmlformats.org/presentationml/2006/main">
+  <p:cSld>
+    <p:spTree>
+      <p:nvGrpSpPr>
         <p:cNvPr id="1" name=""/>
         <p:cNvGrpSpPr/>
         <p:nvPr/>
@@ -5756,4 +8807,299 @@
     </a:ext>
   </a:extLst>
 </a:theme>
+</file>
+
+<file path=ppt/theme/theme2.xml><?xml version="1.0" encoding="utf-8"?>
+<a:theme xmlns:a="http://schemas.openxmlformats.org/drawingml/2006/main" name="Thème Office">
+  <a:themeElements>
+    <a:clrScheme name="Office">
+      <a:dk1>
+        <a:sysClr val="windowText" lastClr="000000"/>
+      </a:dk1>
+      <a:lt1>
+        <a:sysClr val="window" lastClr="FFFFFF"/>
+      </a:lt1>
+      <a:dk2>
+        <a:srgbClr val="44546A"/>
+      </a:dk2>
+      <a:lt2>
+        <a:srgbClr val="E7E6E6"/>
+      </a:lt2>
+      <a:accent1>
+        <a:srgbClr val="4472C4"/>
+      </a:accent1>
+      <a:accent2>
+        <a:srgbClr val="ED7D31"/>
+      </a:accent2>
+      <a:accent3>
+        <a:srgbClr val="A5A5A5"/>
+      </a:accent3>
+      <a:accent4>
+        <a:srgbClr val="FFC000"/>
+      </a:accent4>
+      <a:accent5>
+        <a:srgbClr val="5B9BD5"/>
+      </a:accent5>
+      <a:accent6>
+        <a:srgbClr val="70AD47"/>
+      </a:accent6>
+      <a:hlink>
+        <a:srgbClr val="0563C1"/>
+      </a:hlink>
+      <a:folHlink>
+        <a:srgbClr val="954F72"/>
+      </a:folHlink>
+    </a:clrScheme>
+    <a:fontScheme name="Office">
+      <a:majorFont>
+        <a:latin typeface="Calibri Light" panose="020F0302020204030204"/>
+        <a:ea typeface=""/>
+        <a:cs typeface=""/>
+        <a:font script="Jpan" typeface="游ゴシック Light"/>
+        <a:font script="Hang" typeface="맑은 고딕"/>
+        <a:font script="Hans" typeface="等线 Light"/>
+        <a:font script="Hant" typeface="新細明體"/>
+        <a:font script="Arab" typeface="Times New Roman"/>
+        <a:font script="Hebr" typeface="Times New Roman"/>
+        <a:font script="Thai" typeface="Angsana New"/>
+        <a:font script="Ethi" typeface="Nyala"/>
+        <a:font script="Beng" typeface="Vrinda"/>
+        <a:font script="Gujr" typeface="Shruti"/>
+        <a:font script="Khmr" typeface="MoolBoran"/>
+        <a:font script="Knda" typeface="Tunga"/>
+        <a:font script="Guru" typeface="Raavi"/>
+        <a:font script="Cans" typeface="Euphemia"/>
+        <a:font script="Cher" typeface="Plantagenet Cherokee"/>
+        <a:font script="Yiii" typeface="Microsoft Yi Baiti"/>
+        <a:font script="Tibt" typeface="Microsoft Himalaya"/>
+        <a:font script="Thaa" typeface="MV Boli"/>
+        <a:font script="Deva" typeface="Mangal"/>
+        <a:font script="Telu" typeface="Gautami"/>
+        <a:font script="Taml" typeface="Latha"/>
+        <a:font script="Syrc" typeface="Estrangelo Edessa"/>
+        <a:font script="Orya" typeface="Kalinga"/>
+        <a:font script="Mlym" typeface="Kartika"/>
+        <a:font script="Laoo" typeface="DokChampa"/>
+        <a:font script="Sinh" typeface="Iskoola Pota"/>
+        <a:font script="Mong" typeface="Mongolian Baiti"/>
+        <a:font script="Viet" typeface="Times New Roman"/>
+        <a:font script="Uigh" typeface="Microsoft Uighur"/>
+        <a:font script="Geor" typeface="Sylfaen"/>
+        <a:font script="Armn" typeface="Arial"/>
+        <a:font script="Bugi" typeface="Leelawadee UI"/>
+        <a:font script="Bopo" typeface="Microsoft JhengHei"/>
+        <a:font script="Java" typeface="Javanese Text"/>
+        <a:font script="Lisu" typeface="Segoe UI"/>
+        <a:font script="Mymr" typeface="Myanmar Text"/>
+        <a:font script="Nkoo" typeface="Ebrima"/>
+        <a:font script="Olck" typeface="Nirmala UI"/>
+        <a:font script="Osma" typeface="Ebrima"/>
+        <a:font script="Phag" typeface="Phagspa"/>
+        <a:font script="Syrn" typeface="Estrangelo Edessa"/>
+        <a:font script="Syrj" typeface="Estrangelo Edessa"/>
+        <a:font script="Syre" typeface="Estrangelo Edessa"/>
+        <a:font script="Sora" typeface="Nirmala UI"/>
+        <a:font script="Tale" typeface="Microsoft Tai Le"/>
+        <a:font script="Talu" typeface="Microsoft New Tai Lue"/>
+        <a:font script="Tfng" typeface="Ebrima"/>
+      </a:majorFont>
+      <a:minorFont>
+        <a:latin typeface="Calibri" panose="020F0502020204030204"/>
+        <a:ea typeface=""/>
+        <a:cs typeface=""/>
+        <a:font script="Jpan" typeface="游ゴシック"/>
+        <a:font script="Hang" typeface="맑은 고딕"/>
+        <a:font script="Hans" typeface="等线"/>
+        <a:font script="Hant" typeface="新細明體"/>
+        <a:font script="Arab" typeface="Arial"/>
+        <a:font script="Hebr" typeface="Arial"/>
+        <a:font script="Thai" typeface="Cordia New"/>
+        <a:font script="Ethi" typeface="Nyala"/>
+        <a:font script="Beng" typeface="Vrinda"/>
+        <a:font script="Gujr" typeface="Shruti"/>
+        <a:font script="Khmr" typeface="DaunPenh"/>
+        <a:font script="Knda" typeface="Tunga"/>
+        <a:font script="Guru" typeface="Raavi"/>
+        <a:font script="Cans" typeface="Euphemia"/>
+        <a:font script="Cher" typeface="Plantagenet Cherokee"/>
+        <a:font script="Yiii" typeface="Microsoft Yi Baiti"/>
+        <a:font script="Tibt" typeface="Microsoft Himalaya"/>
+        <a:font script="Thaa" typeface="MV Boli"/>
+        <a:font script="Deva" typeface="Mangal"/>
+        <a:font script="Telu" typeface="Gautami"/>
+        <a:font script="Taml" typeface="Latha"/>
+        <a:font script="Syrc" typeface="Estrangelo Edessa"/>
+        <a:font script="Orya" typeface="Kalinga"/>
+        <a:font script="Mlym" typeface="Kartika"/>
+        <a:font script="Laoo" typeface="DokChampa"/>
+        <a:font script="Sinh" typeface="Iskoola Pota"/>
+        <a:font script="Mong" typeface="Mongolian Baiti"/>
+        <a:font script="Viet" typeface="Arial"/>
+        <a:font script="Uigh" typeface="Microsoft Uighur"/>
+        <a:font script="Geor" typeface="Sylfaen"/>
+        <a:font script="Armn" typeface="Arial"/>
+        <a:font script="Bugi" typeface="Leelawadee UI"/>
+        <a:font script="Bopo" typeface="Microsoft JhengHei"/>
+        <a:font script="Java" typeface="Javanese Text"/>
+        <a:font script="Lisu" typeface="Segoe UI"/>
+        <a:font script="Mymr" typeface="Myanmar Text"/>
+        <a:font script="Nkoo" typeface="Ebrima"/>
+        <a:font script="Olck" typeface="Nirmala UI"/>
+        <a:font script="Osma" typeface="Ebrima"/>
+        <a:font script="Phag" typeface="Phagspa"/>
+        <a:font script="Syrn" typeface="Estrangelo Edessa"/>
+        <a:font script="Syrj" typeface="Estrangelo Edessa"/>
+        <a:font script="Syre" typeface="Estrangelo Edessa"/>
+        <a:font script="Sora" typeface="Nirmala UI"/>
+        <a:font script="Tale" typeface="Microsoft Tai Le"/>
+        <a:font script="Talu" typeface="Microsoft New Tai Lue"/>
+        <a:font script="Tfng" typeface="Ebrima"/>
+      </a:minorFont>
+    </a:fontScheme>
+    <a:fmtScheme name="Office">
+      <a:fillStyleLst>
+        <a:solidFill>
+          <a:schemeClr val="phClr"/>
+        </a:solidFill>
+        <a:gradFill rotWithShape="1">
+          <a:gsLst>
+            <a:gs pos="0">
+              <a:schemeClr val="phClr">
+                <a:lumMod val="110000"/>
+                <a:satMod val="105000"/>
+                <a:tint val="67000"/>
+              </a:schemeClr>
+            </a:gs>
+            <a:gs pos="50000">
+              <a:schemeClr val="phClr">
+                <a:lumMod val="105000"/>
+                <a:satMod val="103000"/>
+                <a:tint val="73000"/>
+              </a:schemeClr>
+            </a:gs>
+            <a:gs pos="100000">
+              <a:schemeClr val="phClr">
+                <a:lumMod val="105000"/>
+                <a:satMod val="109000"/>
+                <a:tint val="81000"/>
+              </a:schemeClr>
+            </a:gs>
+          </a:gsLst>
+          <a:lin ang="5400000" scaled="0"/>
+        </a:gradFill>
+        <a:gradFill rotWithShape="1">
+          <a:gsLst>
+            <a:gs pos="0">
+              <a:schemeClr val="phClr">
+                <a:satMod val="103000"/>
+                <a:lumMod val="102000"/>
+                <a:tint val="94000"/>
+              </a:schemeClr>
+            </a:gs>
+            <a:gs pos="50000">
+              <a:schemeClr val="phClr">
+                <a:satMod val="110000"/>
+                <a:lumMod val="100000"/>
+                <a:shade val="100000"/>
+              </a:schemeClr>
+            </a:gs>
+            <a:gs pos="100000">
+              <a:schemeClr val="phClr">
+                <a:lumMod val="99000"/>
+                <a:satMod val="120000"/>
+                <a:shade val="78000"/>
+              </a:schemeClr>
+            </a:gs>
+          </a:gsLst>
+          <a:lin ang="5400000" scaled="0"/>
+        </a:gradFill>
+      </a:fillStyleLst>
+      <a:lnStyleLst>
+        <a:ln w="6350" cap="flat" cmpd="sng" algn="ctr">
+          <a:solidFill>
+            <a:schemeClr val="phClr"/>
+          </a:solidFill>
+          <a:prstDash val="solid"/>
+          <a:miter lim="800000"/>
+        </a:ln>
+        <a:ln w="12700" cap="flat" cmpd="sng" algn="ctr">
+          <a:solidFill>
+            <a:schemeClr val="phClr"/>
+          </a:solidFill>
+          <a:prstDash val="solid"/>
+          <a:miter lim="800000"/>
+        </a:ln>
+        <a:ln w="19050" cap="flat" cmpd="sng" algn="ctr">
+          <a:solidFill>
+            <a:schemeClr val="phClr"/>
+          </a:solidFill>
+          <a:prstDash val="solid"/>
+          <a:miter lim="800000"/>
+        </a:ln>
+      </a:lnStyleLst>
+      <a:effectStyleLst>
+        <a:effectStyle>
+          <a:effectLst/>
+        </a:effectStyle>
+        <a:effectStyle>
+          <a:effectLst/>
+        </a:effectStyle>
+        <a:effectStyle>
+          <a:effectLst>
+            <a:outerShdw blurRad="57150" dist="19050" dir="5400000" algn="ctr" rotWithShape="0">
+              <a:srgbClr val="000000">
+                <a:alpha val="63000"/>
+              </a:srgbClr>
+            </a:outerShdw>
+          </a:effectLst>
+        </a:effectStyle>
+      </a:effectStyleLst>
+      <a:bgFillStyleLst>
+        <a:solidFill>
+          <a:schemeClr val="phClr"/>
+        </a:solidFill>
+        <a:solidFill>
+          <a:schemeClr val="phClr">
+            <a:tint val="95000"/>
+            <a:satMod val="170000"/>
+          </a:schemeClr>
+        </a:solidFill>
+        <a:gradFill rotWithShape="1">
+          <a:gsLst>
+            <a:gs pos="0">
+              <a:schemeClr val="phClr">
+                <a:tint val="93000"/>
+                <a:satMod val="150000"/>
+                <a:shade val="98000"/>
+                <a:lumMod val="102000"/>
+              </a:schemeClr>
+            </a:gs>
+            <a:gs pos="50000">
+              <a:schemeClr val="phClr">
+                <a:tint val="98000"/>
+                <a:satMod val="130000"/>
+                <a:shade val="90000"/>
+                <a:lumMod val="103000"/>
+              </a:schemeClr>
+            </a:gs>
+            <a:gs pos="100000">
+              <a:schemeClr val="phClr">
+                <a:shade val="63000"/>
+                <a:satMod val="120000"/>
+              </a:schemeClr>
+            </a:gs>
+          </a:gsLst>
+          <a:lin ang="5400000" scaled="0"/>
+        </a:gradFill>
+      </a:bgFillStyleLst>
+    </a:fmtScheme>
+  </a:themeElements>
+  <a:objectDefaults/>
+  <a:extraClrSchemeLst/>
+  <a:extLst>
+    <a:ext uri="{05A4C25C-085E-4340-85A3-A5531E510DB2}">
+      <thm15:themeFamily xmlns:thm15="http://schemas.microsoft.com/office/thememl/2012/main" name="Office Theme" id="{62F939B6-93AF-4DB8-9C6B-D6C7DFDC589F}" vid="{4A3C46E8-61CC-4603-A589-7422A47A8E4A}"/>
+    </a:ext>
+  </a:extLst>
+</a:theme>
 </file>